--- a/Topic_E/Exam_Practice/TE-L05_Speaking_Workshop_Faiths_Beliefs_and_Places_of_Worship.pptx
+++ b/Topic_E/Exam_Practice/TE-L05_Speaking_Workshop_Faiths_Beliefs_and_Places_of_Worship.pptx
@@ -615,7 +615,11 @@
           <a:lstStyle/>
           <a:p>
             <a:r>
-              <a:rPr lang="en-US" dirty="0"/>
+              <a:rPr lang="ar-SA" dirty="0">
+                <a:latin typeface="Amiri" pitchFamily="2" charset="-78"/>
+                <a:ea typeface="Amiri" pitchFamily="2" charset="-78"/>
+                <a:cs typeface="Amiri" pitchFamily="2" charset="-78"/>
+              </a:rPr>
               <a:t>ROLE PLAY C (Develop) — an interfaith youth project.
 SET-UP IN THE BREAKOUT ROOM: A = examiner (reads the left column ONLY — the questions, in order), B = candidate (sees the task column; Core may use the help column), C = observer (ticks the feedback checklist). 1 minute preparation, about 3 minutes speaking, 1 minute feedback, then rotate.
 Task ! is the unexpected question: in the exam the candidate has not seen it — the examiner should read it without warning.
@@ -707,7 +711,11 @@
           <a:lstStyle/>
           <a:p>
             <a:r>
-              <a:rPr lang="en-US" dirty="0"/>
+              <a:rPr lang="ar-SA" dirty="0">
+                <a:latin typeface="Amiri" pitchFamily="2" charset="-78"/>
+                <a:ea typeface="Amiri" pitchFamily="2" charset="-78"/>
+                <a:cs typeface="Amiri" pitchFamily="2" charset="-78"/>
+              </a:rPr>
               <a:t>ROLE PLAY D (Stretch) — a radio panel.
 SET-UP IN THE BREAKOUT ROOM: A = examiner (reads the left column ONLY — the questions, in order), B = candidate (sees the task column; Core may use the help column), C = observer (ticks the feedback checklist). 1 minute preparation, about 3 minutes speaking, 1 minute feedback, then rotate.
 Task ! is the unexpected question: in the exam the candidate has not seen it — the examiner should read it without warning.
@@ -1243,7 +1251,11 @@
           <a:lstStyle/>
           <a:p>
             <a:r>
-              <a:rPr lang="en-US" dirty="0"/>
+              <a:rPr lang="ar-SA" dirty="0">
+                <a:latin typeface="Amiri" pitchFamily="2" charset="-78"/>
+                <a:ea typeface="Amiri" pitchFamily="2" charset="-78"/>
+                <a:cs typeface="Amiri" pitchFamily="2" charset="-78"/>
+              </a:rPr>
               <a:t>TOPIC CONVERSATION — Core. Examiner asks the questions in order and may add “لِمَاذَا؟ / هَلْ يُمْكِنُ أَنْ تَشْرَحَ أَكْثَرَ؟” to push for more. Candidate aims for one full sentence per question.
 </a:t>
             </a:r>
@@ -1332,7 +1344,11 @@
           <a:lstStyle/>
           <a:p>
             <a:r>
-              <a:rPr lang="en-US" dirty="0"/>
+              <a:rPr lang="ar-SA" dirty="0">
+                <a:latin typeface="Amiri" pitchFamily="2" charset="-78"/>
+                <a:ea typeface="Amiri" pitchFamily="2" charset="-78"/>
+                <a:cs typeface="Amiri" pitchFamily="2" charset="-78"/>
+              </a:rPr>
               <a:t>TOPIC CONVERSATION — Develop. Examiner asks the questions in order and may add “لِمَاذَا؟ / هَلْ يُمْكِنُ أَنْ تَشْرَحَ أَكْثَرَ؟” to push for more. Candidate aims for two or three sentences, with a relative clause and respectful language.
 </a:t>
             </a:r>
@@ -1421,7 +1437,11 @@
           <a:lstStyle/>
           <a:p>
             <a:r>
-              <a:rPr lang="en-US" dirty="0"/>
+              <a:rPr lang="ar-SA" dirty="0">
+                <a:latin typeface="Amiri" pitchFamily="2" charset="-78"/>
+                <a:ea typeface="Amiri" pitchFamily="2" charset="-78"/>
+                <a:cs typeface="Amiri" pitchFamily="2" charset="-78"/>
+              </a:rPr>
               <a:t>TOPIC CONVERSATION — Stretch. Examiner asks the questions in order and may add “لِمَاذَا؟ / هَلْ يُمْكِنُ أَنْ تَشْرَحَ أَكْثَرَ؟” to push for more. Candidate aims for a developed answer: opinion, balance, concession and a conditional.
 </a:t>
             </a:r>
@@ -1510,7 +1530,11 @@
           <a:lstStyle/>
           <a:p>
             <a:r>
-              <a:rPr lang="en-US" dirty="0"/>
+              <a:rPr lang="ar-SA" dirty="0">
+                <a:latin typeface="Amiri" pitchFamily="2" charset="-78"/>
+                <a:ea typeface="Amiri" pitchFamily="2" charset="-78"/>
+                <a:cs typeface="Amiri" pitchFamily="2" charset="-78"/>
+              </a:rPr>
               <a:t>WELCOME (1 min) — while students join.
 • Greet each student by name as they arrive: السَّلَامُ عَلَيْكُمْ. Take the register (Pastoral Tracker: attendance 0/1).
 • 2-MINUTE CHECK-IN (SEND training): a private chat to any student who seemed unsettled last lesson — “Are you okay today? 👍 / 👎”.
@@ -2224,7 +2248,11 @@
           <a:lstStyle/>
           <a:p>
             <a:r>
-              <a:rPr lang="en-US" dirty="0"/>
+              <a:rPr lang="ar-SA" dirty="0">
+                <a:latin typeface="Amiri" pitchFamily="2" charset="-78"/>
+                <a:ea typeface="Amiri" pitchFamily="2" charset="-78"/>
+                <a:cs typeface="Amiri" pitchFamily="2" charset="-78"/>
+              </a:rPr>
               <a:t>TEACH (3 min). Role play = precise and complete; conversation = develop. Choral repetition of the repair phrases. To a girl: تُعِيدِي.</a:t>
             </a:r>
             <a:endParaRPr lang="en-US" dirty="0"/>
@@ -2312,7 +2340,11 @@
           <a:lstStyle/>
           <a:p>
             <a:r>
-              <a:rPr lang="en-US" dirty="0"/>
+              <a:rPr lang="ar-SA" dirty="0">
+                <a:latin typeface="Amiri" pitchFamily="2" charset="-78"/>
+                <a:ea typeface="Amiri" pitchFamily="2" charset="-78"/>
+                <a:cs typeface="Amiri" pitchFamily="2" charset="-78"/>
+              </a:rPr>
               <a:t>LANGUAGE BANK (2 min) — use accurate, neutral words: مَسْجِدٌ · كَنِيسَةٌ · كَنِيسٌ · مَعْبَدٌ. Nisba for followers: مُسْلِمٌ / مُسْلِمَةٌ / مُسْلِمُونَ; مَسِيحِيٌّ · يَهُودِيٌّ · هِنْدُوسِيٌّ · سِيخِيٌّ. Teacher note: model calm, factual language — "Muslims believe …" (يُؤْمِنُ المُسْلِمُونَ بِاللّٰهِ), not opinions about other faiths.</a:t>
             </a:r>
             <a:endParaRPr lang="en-US" dirty="0"/>
@@ -2400,7 +2432,11 @@
           <a:lstStyle/>
           <a:p>
             <a:r>
-              <a:rPr lang="en-US" dirty="0"/>
+              <a:rPr lang="ar-SA" dirty="0">
+                <a:latin typeface="Amiri" pitchFamily="2" charset="-78"/>
+                <a:ea typeface="Amiri" pitchFamily="2" charset="-78"/>
+                <a:cs typeface="Amiri" pitchFamily="2" charset="-78"/>
+              </a:rPr>
               <a:t>LANGUAGE BANK (2 min) — nominal sentence: فِي حَيِّنَا كَنِيسَةٌ قَدِيمَةٌ (predicate first when the subject is indefinite). Relative clause: الكَنِيسَةُ الَّتِي بِجَانِبِ مَدْرَسَتِي · النَّاسُ الَّذِينَ يُصَلُّونَ هُنَاكَ.</a:t>
             </a:r>
             <a:endParaRPr lang="en-US" dirty="0"/>
@@ -2576,7 +2612,11 @@
           <a:lstStyle/>
           <a:p>
             <a:r>
-              <a:rPr lang="en-US" dirty="0"/>
+              <a:rPr lang="ar-SA" dirty="0">
+                <a:latin typeface="Amiri" pitchFamily="2" charset="-78"/>
+                <a:ea typeface="Amiri" pitchFamily="2" charset="-78"/>
+                <a:cs typeface="Amiri" pitchFamily="2" charset="-78"/>
+              </a:rPr>
               <a:t>ROLE PLAY A (Core) — a mosque open day.
 SET-UP IN THE BREAKOUT ROOM: A = examiner (reads the left column ONLY — the questions, in order), B = candidate (sees the task column; Core may use the help column), C = observer (ticks the feedback checklist). 1 minute preparation, about 3 minutes speaking, 1 minute feedback, then rotate.
 Task ! is the unexpected question: in the exam the candidate has not seen it — the examiner should read it without warning.
@@ -2668,7 +2708,11 @@
           <a:lstStyle/>
           <a:p>
             <a:r>
-              <a:rPr lang="en-US" dirty="0"/>
+              <a:rPr lang="ar-SA" dirty="0">
+                <a:latin typeface="Amiri" pitchFamily="2" charset="-78"/>
+                <a:ea typeface="Amiri" pitchFamily="2" charset="-78"/>
+                <a:cs typeface="Amiri" pitchFamily="2" charset="-78"/>
+              </a:rPr>
               <a:t>ROLE PLAY B (Core+) — planning a school trip.
 SET-UP IN THE BREAKOUT ROOM: A = examiner (reads the left column ONLY — the questions, in order), B = candidate (sees the task column; Core may use the help column), C = observer (ticks the feedback checklist). 1 minute preparation, about 3 minutes speaking, 1 minute feedback, then rotate.
 Task ! is the unexpected question: in the exam the candidate has not seen it — the examiner should read it without warning.
@@ -3156,6 +3200,7 @@
                   <a:srgbClr val="D4AF37"/>
                 </a:solidFill>
                 <a:latin typeface="Amiri" pitchFamily="2" charset="-78"/>
+                <a:ea typeface="Amiri" pitchFamily="2" charset="-78"/>
                 <a:cs typeface="Amiri" pitchFamily="2" charset="-78"/>
               </a:rPr>
               <a:t>م</a:t>
@@ -3362,6 +3407,7 @@
                   <a:srgbClr val="D4AF37"/>
                 </a:solidFill>
                 <a:latin typeface="Amiri" pitchFamily="2" charset="-78"/>
+                <a:ea typeface="Amiri" pitchFamily="2" charset="-78"/>
                 <a:cs typeface="Amiri" pitchFamily="2" charset="-78"/>
               </a:rPr>
               <a:t>وَرْشَةُ التَّحَدُّثِ — الأَدْيَانُ وَأَمَاكِنُ العِبَادَةِ</a:t>
@@ -3413,6 +3459,7 @@
                   <a:srgbClr val="C6D2E6"/>
                 </a:solidFill>
                 <a:latin typeface="Amiri" pitchFamily="2" charset="-78"/>
+                <a:ea typeface="Amiri" pitchFamily="2" charset="-78"/>
                 <a:cs typeface="Amiri" pitchFamily="2" charset="-78"/>
               </a:rPr>
               <a:t>الَّذِي</a:t>
@@ -3439,6 +3486,7 @@
                   <a:srgbClr val="C6D2E6"/>
                 </a:solidFill>
                 <a:latin typeface="Amiri" pitchFamily="2" charset="-78"/>
+                <a:ea typeface="Amiri" pitchFamily="2" charset="-78"/>
                 <a:cs typeface="Amiri" pitchFamily="2" charset="-78"/>
               </a:rPr>
               <a:t>الَّتِي</a:t>
@@ -3465,6 +3513,7 @@
                   <a:srgbClr val="C6D2E6"/>
                 </a:solidFill>
                 <a:latin typeface="Amiri" pitchFamily="2" charset="-78"/>
+                <a:ea typeface="Amiri" pitchFamily="2" charset="-78"/>
                 <a:cs typeface="Amiri" pitchFamily="2" charset="-78"/>
               </a:rPr>
               <a:t>الَّذِينَ</a:t>
@@ -3491,6 +3540,7 @@
                   <a:srgbClr val="C6D2E6"/>
                 </a:solidFill>
                 <a:latin typeface="Amiri" pitchFamily="2" charset="-78"/>
+                <a:ea typeface="Amiri" pitchFamily="2" charset="-78"/>
                 <a:cs typeface="Amiri" pitchFamily="2" charset="-78"/>
               </a:rPr>
               <a:t>أَمَامَ</a:t>
@@ -3517,6 +3567,7 @@
                   <a:srgbClr val="C6D2E6"/>
                 </a:solidFill>
                 <a:latin typeface="Amiri" pitchFamily="2" charset="-78"/>
+                <a:ea typeface="Amiri" pitchFamily="2" charset="-78"/>
                 <a:cs typeface="Amiri" pitchFamily="2" charset="-78"/>
               </a:rPr>
               <a:t>بِجَانِبِ</a:t>
@@ -3543,6 +3594,7 @@
                   <a:srgbClr val="C6D2E6"/>
                 </a:solidFill>
                 <a:latin typeface="Amiri" pitchFamily="2" charset="-78"/>
+                <a:ea typeface="Amiri" pitchFamily="2" charset="-78"/>
                 <a:cs typeface="Amiri" pitchFamily="2" charset="-78"/>
               </a:rPr>
               <a:t>دَاخِلَ</a:t>
@@ -3975,6 +4027,7 @@
                   <a:srgbClr val="D4AF37"/>
                 </a:solidFill>
                 <a:latin typeface="Amiri" pitchFamily="2" charset="-78"/>
+                <a:ea typeface="Amiri" pitchFamily="2" charset="-78"/>
                 <a:cs typeface="Amiri" pitchFamily="2" charset="-78"/>
               </a:rPr>
               <a:t>م</a:t>
@@ -4295,6 +4348,7 @@
                   <a:srgbClr val="8A6D1E"/>
                 </a:solidFill>
                 <a:latin typeface="Amiri" pitchFamily="2" charset="-78"/>
+                <a:ea typeface="Amiri" pitchFamily="2" charset="-78"/>
                 <a:cs typeface="Amiri" pitchFamily="2" charset="-78"/>
               </a:rPr>
               <a:t>زِيَارَةُ مَكَانِ عِبَادَةِ صَدِيقِي</a:t>
@@ -4575,6 +4629,7 @@
                   <a:srgbClr val="1B3B6F"/>
                 </a:solidFill>
                 <a:latin typeface="Amiri" pitchFamily="2" charset="-78"/>
+                <a:ea typeface="Amiri" pitchFamily="2" charset="-78"/>
                 <a:cs typeface="Amiri" pitchFamily="2" charset="-78"/>
               </a:rPr>
               <a:t>زُرْتُ … الَّذِي يُصَلِّي فِيهِ … ، وَكَانَ …</a:t>
@@ -4651,6 +4706,7 @@
                   <a:srgbClr val="1B3B6F"/>
                 </a:solidFill>
                 <a:latin typeface="Amiri" pitchFamily="2" charset="-78"/>
+                <a:ea typeface="Amiri" pitchFamily="2" charset="-78"/>
                 <a:cs typeface="Amiri" pitchFamily="2" charset="-78"/>
               </a:rPr>
               <a:t>حَدِّثْنَا عَنْ زِيَارَتِكَ الأُولَى لِمَكَانِ عِبَادَةٍ آخَرَ.</a:t>
@@ -4754,6 +4810,7 @@
                   <a:srgbClr val="1B3B6F"/>
                 </a:solidFill>
                 <a:latin typeface="Amiri" pitchFamily="2" charset="-78"/>
+                <a:ea typeface="Amiri" pitchFamily="2" charset="-78"/>
                 <a:cs typeface="Amiri" pitchFamily="2" charset="-78"/>
               </a:rPr>
               <a:t>فِي وَسَطِ … وَأَمَامَ …</a:t>
@@ -4830,6 +4887,7 @@
                   <a:srgbClr val="1B3B6F"/>
                 </a:solidFill>
                 <a:latin typeface="Amiri" pitchFamily="2" charset="-78"/>
+                <a:ea typeface="Amiri" pitchFamily="2" charset="-78"/>
                 <a:cs typeface="Amiri" pitchFamily="2" charset="-78"/>
               </a:rPr>
               <a:t>مَاذَا رَأَيْتَ هُنَاكَ؟</a:t>
@@ -4933,6 +4991,7 @@
                   <a:srgbClr val="1B3B6F"/>
                 </a:solidFill>
                 <a:latin typeface="Amiri" pitchFamily="2" charset="-78"/>
+                <a:ea typeface="Amiri" pitchFamily="2" charset="-78"/>
                 <a:cs typeface="Amiri" pitchFamily="2" charset="-78"/>
               </a:rPr>
               <a:t>لَاحَظْتُ أَنَّ … مِثْلَ … بَيْنَمَا …</a:t>
@@ -5009,6 +5068,7 @@
                   <a:srgbClr val="1B3B6F"/>
                 </a:solidFill>
                 <a:latin typeface="Amiri" pitchFamily="2" charset="-78"/>
+                <a:ea typeface="Amiri" pitchFamily="2" charset="-78"/>
                 <a:cs typeface="Amiri" pitchFamily="2" charset="-78"/>
               </a:rPr>
               <a:t>هَلْ لَاحَظْتَ تَشَابُهًا مَعَ المَسْجِدِ؟</a:t>
@@ -5112,6 +5172,7 @@
                   <a:srgbClr val="1B3B6F"/>
                 </a:solidFill>
                 <a:latin typeface="Amiri" pitchFamily="2" charset="-78"/>
+                <a:ea typeface="Amiri" pitchFamily="2" charset="-78"/>
                 <a:cs typeface="Amiri" pitchFamily="2" charset="-78"/>
               </a:rPr>
               <a:t>تَعَلَّمْتُ أَنَّ … لِذٰلِكَ …</a:t>
@@ -5188,6 +5249,7 @@
                   <a:srgbClr val="1B3B6F"/>
                 </a:solidFill>
                 <a:latin typeface="Amiri" pitchFamily="2" charset="-78"/>
+                <a:ea typeface="Amiri" pitchFamily="2" charset="-78"/>
                 <a:cs typeface="Amiri" pitchFamily="2" charset="-78"/>
               </a:rPr>
               <a:t>مَا الَّذِي تَعَلَّمْتَهُ؟</a:t>
@@ -5291,6 +5353,7 @@
                   <a:srgbClr val="1B3B6F"/>
                 </a:solidFill>
                 <a:latin typeface="Amiri" pitchFamily="2" charset="-78"/>
+                <a:ea typeface="Amiri" pitchFamily="2" charset="-78"/>
                 <a:cs typeface="Amiri" pitchFamily="2" charset="-78"/>
               </a:rPr>
               <a:t>كَانَتْ … ؛ فَقَدْ شَاهَدَ … وَسَأَلَ …</a:t>
@@ -5367,6 +5430,7 @@
                   <a:srgbClr val="1B3B6F"/>
                 </a:solidFill>
                 <a:latin typeface="Amiri" pitchFamily="2" charset="-78"/>
+                <a:ea typeface="Amiri" pitchFamily="2" charset="-78"/>
                 <a:cs typeface="Amiri" pitchFamily="2" charset="-78"/>
               </a:rPr>
               <a:t>كَيْفَ كَانَتْ زِيَارَتُهُ لِلْمَسْجِدِ؟</a:t>
@@ -5576,6 +5640,7 @@
                   <a:srgbClr val="D4AF37"/>
                 </a:solidFill>
                 <a:latin typeface="Amiri" pitchFamily="2" charset="-78"/>
+                <a:ea typeface="Amiri" pitchFamily="2" charset="-78"/>
                 <a:cs typeface="Amiri" pitchFamily="2" charset="-78"/>
               </a:rPr>
               <a:t>م</a:t>
@@ -5896,6 +5961,7 @@
                   <a:srgbClr val="8A6D1E"/>
                 </a:solidFill>
                 <a:latin typeface="Amiri" pitchFamily="2" charset="-78"/>
+                <a:ea typeface="Amiri" pitchFamily="2" charset="-78"/>
                 <a:cs typeface="Amiri" pitchFamily="2" charset="-78"/>
               </a:rPr>
               <a:t>الإِيمَانُ وَالاحْتِرَامُ فِي مَدِينَةٍ مُتَنَوِّعَةٍ</a:t>
@@ -6176,6 +6242,7 @@
                   <a:srgbClr val="1B3B6F"/>
                 </a:solidFill>
                 <a:latin typeface="Amiri" pitchFamily="2" charset="-78"/>
+                <a:ea typeface="Amiri" pitchFamily="2" charset="-78"/>
                 <a:cs typeface="Amiri" pitchFamily="2" charset="-78"/>
               </a:rPr>
               <a:t>فِي مَدِينَتِنَا … ؛ فَفِي شَارِعٍ وَاحِدٍ …</a:t>
@@ -6252,6 +6319,7 @@
                   <a:srgbClr val="1B3B6F"/>
                 </a:solidFill>
                 <a:latin typeface="Amiri" pitchFamily="2" charset="-78"/>
+                <a:ea typeface="Amiri" pitchFamily="2" charset="-78"/>
                 <a:cs typeface="Amiri" pitchFamily="2" charset="-78"/>
               </a:rPr>
               <a:t>مَدِينَتُكُمْ مِنْ أَكْثَرِ المُدُنِ تَنَوُّعًا. كَيْفَ تَصِفُ ذٰلِكَ؟</a:t>
@@ -6355,6 +6423,7 @@
                   <a:srgbClr val="1B3B6F"/>
                 </a:solidFill>
                 <a:latin typeface="Amiri" pitchFamily="2" charset="-78"/>
+                <a:ea typeface="Amiri" pitchFamily="2" charset="-78"/>
                 <a:cs typeface="Amiri" pitchFamily="2" charset="-78"/>
               </a:rPr>
               <a:t>لَا، … لَيْسَ … بَلْ …</a:t>
@@ -6431,6 +6500,7 @@
                   <a:srgbClr val="1B3B6F"/>
                 </a:solidFill>
                 <a:latin typeface="Amiri" pitchFamily="2" charset="-78"/>
+                <a:ea typeface="Amiri" pitchFamily="2" charset="-78"/>
                 <a:cs typeface="Amiri" pitchFamily="2" charset="-78"/>
               </a:rPr>
               <a:t>هَلْ يَعْنِي هٰذَا أَنَّ الجَمِيعَ يَتَّفِقُونَ؟</a:t>
@@ -6534,6 +6604,7 @@
                   <a:srgbClr val="1B3B6F"/>
                 </a:solidFill>
                 <a:latin typeface="Amiri" pitchFamily="2" charset="-78"/>
+                <a:ea typeface="Amiri" pitchFamily="2" charset="-78"/>
                 <a:cs typeface="Amiri" pitchFamily="2" charset="-78"/>
               </a:rPr>
               <a:t>عِنْدَمَا … فَتَحَتِ … وَطَبَخَ …</a:t>
@@ -6610,6 +6681,7 @@
                   <a:srgbClr val="1B3B6F"/>
                 </a:solidFill>
                 <a:latin typeface="Amiri" pitchFamily="2" charset="-78"/>
+                <a:ea typeface="Amiri" pitchFamily="2" charset="-78"/>
                 <a:cs typeface="Amiri" pitchFamily="2" charset="-78"/>
               </a:rPr>
               <a:t>أَعْطِنَا مِثَالًا عَلَى التَّعَاوُنِ.</a:t>
@@ -6713,6 +6785,7 @@
                   <a:srgbClr val="1B3B6F"/>
                 </a:solidFill>
                 <a:latin typeface="Amiri" pitchFamily="2" charset="-78"/>
+                <a:ea typeface="Amiri" pitchFamily="2" charset="-78"/>
                 <a:cs typeface="Amiri" pitchFamily="2" charset="-78"/>
               </a:rPr>
               <a:t>صَحِيحٌ أَنَّ … غَيْرَ أَنَّ … ؛ لِذٰلِكَ …</a:t>
@@ -6789,6 +6862,7 @@
                   <a:srgbClr val="1B3B6F"/>
                 </a:solidFill>
                 <a:latin typeface="Amiri" pitchFamily="2" charset="-78"/>
+                <a:ea typeface="Amiri" pitchFamily="2" charset="-78"/>
                 <a:cs typeface="Amiri" pitchFamily="2" charset="-78"/>
               </a:rPr>
               <a:t>لٰكِنَّ بَعْضَ النَّاسِ يَخَافُونَ مِنَ المُخْتَلِفِ.</a:t>
@@ -6892,6 +6966,7 @@
                   <a:srgbClr val="1B3B6F"/>
                 </a:solidFill>
                 <a:latin typeface="Amiri" pitchFamily="2" charset="-78"/>
+                <a:ea typeface="Amiri" pitchFamily="2" charset="-78"/>
                 <a:cs typeface="Amiri" pitchFamily="2" charset="-78"/>
               </a:rPr>
               <a:t>لَوْ طُلِبَ مِنِّي ذٰلِكَ، لَكَتَبْتُ: "…"</a:t>
@@ -6971,6 +7046,7 @@
                   <a:srgbClr val="1B3B6F"/>
                 </a:solidFill>
                 <a:latin typeface="Amiri" pitchFamily="2" charset="-78"/>
+                <a:ea typeface="Amiri" pitchFamily="2" charset="-78"/>
                 <a:cs typeface="Amiri" pitchFamily="2" charset="-78"/>
               </a:rPr>
               <a:t>لَوْ طُلِبَ مِنْكَ أَنْ تَكْتُبَ رِسَالَةً وَاحِدَةً عَلَى جِدَارِ المَدِينَةِ، مَاذَا تَكْتُبُ؟</a:t>
@@ -7180,6 +7256,7 @@
                   <a:srgbClr val="D4AF37"/>
                 </a:solidFill>
                 <a:latin typeface="Amiri" pitchFamily="2" charset="-78"/>
+                <a:ea typeface="Amiri" pitchFamily="2" charset="-78"/>
                 <a:cs typeface="Amiri" pitchFamily="2" charset="-78"/>
               </a:rPr>
               <a:t>م</a:t>
@@ -7500,6 +7577,7 @@
                   <a:srgbClr val="8A6D1E"/>
                 </a:solidFill>
                 <a:latin typeface="Amiri" pitchFamily="2" charset="-78"/>
+                <a:ea typeface="Amiri" pitchFamily="2" charset="-78"/>
                 <a:cs typeface="Amiri" pitchFamily="2" charset="-78"/>
               </a:rPr>
               <a:t>وَرَقَةُ المُلَاحِظِ</a:t>
@@ -8970,6 +9048,7 @@
                   <a:srgbClr val="D4AF37"/>
                 </a:solidFill>
                 <a:latin typeface="Amiri" pitchFamily="2" charset="-78"/>
+                <a:ea typeface="Amiri" pitchFamily="2" charset="-78"/>
                 <a:cs typeface="Amiri" pitchFamily="2" charset="-78"/>
               </a:rPr>
               <a:t>م</a:t>
@@ -9290,6 +9369,7 @@
                   <a:srgbClr val="8A6D1E"/>
                 </a:solidFill>
                 <a:latin typeface="Amiri" pitchFamily="2" charset="-78"/>
+                <a:ea typeface="Amiri" pitchFamily="2" charset="-78"/>
                 <a:cs typeface="Amiri" pitchFamily="2" charset="-78"/>
               </a:rPr>
               <a:t>نَمُوذَجُ الإِجَابَةِ</a:t>
@@ -9532,6 +9612,7 @@
                   <a:srgbClr val="1B3B6F"/>
                 </a:solidFill>
                 <a:latin typeface="Amiri" pitchFamily="2" charset="-78"/>
+                <a:ea typeface="Amiri" pitchFamily="2" charset="-78"/>
                 <a:cs typeface="Amiri" pitchFamily="2" charset="-78"/>
               </a:rPr>
               <a:t>صَبَاحَ النُّورِ! اسْمُهُ مَسْجِدُ النُّورِ.</a:t>
@@ -9608,6 +9689,7 @@
                   <a:srgbClr val="1B3B6F"/>
                 </a:solidFill>
                 <a:latin typeface="Amiri" pitchFamily="2" charset="-78"/>
+                <a:ea typeface="Amiri" pitchFamily="2" charset="-78"/>
                 <a:cs typeface="Amiri" pitchFamily="2" charset="-78"/>
               </a:rPr>
               <a:t>صَبَاحَ الخَيْرِ! مَا اسْمُ هٰذَا المَسْجِدِ؟</a:t>
@@ -9711,6 +9793,7 @@
                   <a:srgbClr val="1B3B6F"/>
                 </a:solidFill>
                 <a:latin typeface="Amiri" pitchFamily="2" charset="-78"/>
+                <a:ea typeface="Amiri" pitchFamily="2" charset="-78"/>
                 <a:cs typeface="Amiri" pitchFamily="2" charset="-78"/>
               </a:rPr>
               <a:t>لَا، بُنِيَ فِي سَنَةِ أَلْفَيْنِ.</a:t>
@@ -9787,6 +9870,7 @@
                   <a:srgbClr val="1B3B6F"/>
                 </a:solidFill>
                 <a:latin typeface="Amiri" pitchFamily="2" charset="-78"/>
+                <a:ea typeface="Amiri" pitchFamily="2" charset="-78"/>
                 <a:cs typeface="Amiri" pitchFamily="2" charset="-78"/>
               </a:rPr>
               <a:t>هَلْ هُوَ قَدِيمٌ؟</a:t>
@@ -9890,6 +9974,7 @@
                   <a:srgbClr val="1B3B6F"/>
                 </a:solidFill>
                 <a:latin typeface="Amiri" pitchFamily="2" charset="-78"/>
+                <a:ea typeface="Amiri" pitchFamily="2" charset="-78"/>
                 <a:cs typeface="Amiri" pitchFamily="2" charset="-78"/>
               </a:rPr>
               <a:t>تُوجَدُ قَاعَةٌ كَبِيرَةٌ لِلصَّلَاةِ، وَمَكْتَبَةٌ صَغِيرَةٌ.</a:t>
@@ -9966,6 +10051,7 @@
                   <a:srgbClr val="1B3B6F"/>
                 </a:solidFill>
                 <a:latin typeface="Amiri" pitchFamily="2" charset="-78"/>
+                <a:ea typeface="Amiri" pitchFamily="2" charset="-78"/>
                 <a:cs typeface="Amiri" pitchFamily="2" charset="-78"/>
               </a:rPr>
               <a:t>مَاذَا يُوجَدُ دَاخِلَ المَسْجِدِ؟</a:t>
@@ -10069,6 +10155,7 @@
                   <a:srgbClr val="1B3B6F"/>
                 </a:solidFill>
                 <a:latin typeface="Amiri" pitchFamily="2" charset="-78"/>
+                <a:ea typeface="Amiri" pitchFamily="2" charset="-78"/>
                 <a:cs typeface="Amiri" pitchFamily="2" charset="-78"/>
               </a:rPr>
               <a:t>أَهْلًا بِكَ! أَيْنَ تَسْكُنُ؟</a:t>
@@ -10145,6 +10232,7 @@
                   <a:srgbClr val="1B3B6F"/>
                 </a:solidFill>
                 <a:latin typeface="Amiri" pitchFamily="2" charset="-78"/>
+                <a:ea typeface="Amiri" pitchFamily="2" charset="-78"/>
                 <a:cs typeface="Amiri" pitchFamily="2" charset="-78"/>
               </a:rPr>
               <a:t>جَمِيلٌ! أَنَا جَارُكُمْ.</a:t>
@@ -10248,6 +10336,7 @@
                   <a:srgbClr val="1B3B6F"/>
                 </a:solidFill>
                 <a:latin typeface="Amiri" pitchFamily="2" charset="-78"/>
+                <a:ea typeface="Amiri" pitchFamily="2" charset="-78"/>
                 <a:cs typeface="Amiri" pitchFamily="2" charset="-78"/>
               </a:rPr>
               <a:t>يُصَلِّي المُسْلِمُونَ خَمْسَ مَرَّاتٍ فِي اليَوْمِ.</a:t>
@@ -10324,6 +10413,7 @@
                   <a:srgbClr val="1B3B6F"/>
                 </a:solidFill>
                 <a:latin typeface="Amiri" pitchFamily="2" charset="-78"/>
+                <a:ea typeface="Amiri" pitchFamily="2" charset="-78"/>
                 <a:cs typeface="Amiri" pitchFamily="2" charset="-78"/>
               </a:rPr>
               <a:t>فِي الشَّارِعِ المُقَابِلِ. كَمْ مَرَّةً يُصَلِّي المُسْلِمُونَ؟</a:t>
@@ -10533,6 +10623,7 @@
                   <a:srgbClr val="D4AF37"/>
                 </a:solidFill>
                 <a:latin typeface="Amiri" pitchFamily="2" charset="-78"/>
+                <a:ea typeface="Amiri" pitchFamily="2" charset="-78"/>
                 <a:cs typeface="Amiri" pitchFamily="2" charset="-78"/>
               </a:rPr>
               <a:t>م</a:t>
@@ -10853,6 +10944,7 @@
                   <a:srgbClr val="8A6D1E"/>
                 </a:solidFill>
                 <a:latin typeface="Amiri" pitchFamily="2" charset="-78"/>
+                <a:ea typeface="Amiri" pitchFamily="2" charset="-78"/>
                 <a:cs typeface="Amiri" pitchFamily="2" charset="-78"/>
               </a:rPr>
               <a:t>نَمُوذَجُ الإِجَابَةِ</a:t>
@@ -11095,6 +11187,7 @@
                   <a:srgbClr val="1B3B6F"/>
                 </a:solidFill>
                 <a:latin typeface="Amiri" pitchFamily="2" charset="-78"/>
+                <a:ea typeface="Amiri" pitchFamily="2" charset="-78"/>
                 <a:cs typeface="Amiri" pitchFamily="2" charset="-78"/>
               </a:rPr>
               <a:t>أَعْرِفُ الكَنِيسَةَ الَّتِي بِجَانِبِ مَدْرَسَتِنَا.</a:t>
@@ -11171,6 +11264,7 @@
                   <a:srgbClr val="1B3B6F"/>
                 </a:solidFill>
                 <a:latin typeface="Amiri" pitchFamily="2" charset="-78"/>
+                <a:ea typeface="Amiri" pitchFamily="2" charset="-78"/>
                 <a:cs typeface="Amiri" pitchFamily="2" charset="-78"/>
               </a:rPr>
               <a:t>سَنَزُورُ ثَلَاثَةَ أَمَاكِنَ لِلْعِبَادَةِ. أَيُّ مَكَانٍ تَعْرِفُهُ؟</a:t>
@@ -11274,6 +11368,7 @@
                   <a:srgbClr val="1B3B6F"/>
                 </a:solidFill>
                 <a:latin typeface="Amiri" pitchFamily="2" charset="-78"/>
+                <a:ea typeface="Amiri" pitchFamily="2" charset="-78"/>
                 <a:cs typeface="Amiri" pitchFamily="2" charset="-78"/>
               </a:rPr>
               <a:t>هِيَ قَدِيمَةٌ وَجَمِيلَةٌ، وَلَهَا بُرْجٌ عَالٍ.</a:t>
@@ -11350,6 +11445,7 @@
                   <a:srgbClr val="1B3B6F"/>
                 </a:solidFill>
                 <a:latin typeface="Amiri" pitchFamily="2" charset="-78"/>
+                <a:ea typeface="Amiri" pitchFamily="2" charset="-78"/>
                 <a:cs typeface="Amiri" pitchFamily="2" charset="-78"/>
               </a:rPr>
               <a:t>كَيْفَ هِيَ؟</a:t>
@@ -11453,6 +11549,7 @@
                   <a:srgbClr val="1B3B6F"/>
                 </a:solidFill>
                 <a:latin typeface="Amiri" pitchFamily="2" charset="-78"/>
+                <a:ea typeface="Amiri" pitchFamily="2" charset="-78"/>
                 <a:cs typeface="Amiri" pitchFamily="2" charset="-78"/>
               </a:rPr>
               <a:t>يَنْبَغِي أَنْ نَتَكَلَّمَ بِهُدُوءٍ، وَلَا نُصَوِّرَ النَّاسَ الَّذِينَ يُصَلُّونَ.</a:t>
@@ -11529,6 +11626,7 @@
                   <a:srgbClr val="1B3B6F"/>
                 </a:solidFill>
                 <a:latin typeface="Amiri" pitchFamily="2" charset="-78"/>
+                <a:ea typeface="Amiri" pitchFamily="2" charset="-78"/>
                 <a:cs typeface="Amiri" pitchFamily="2" charset="-78"/>
               </a:rPr>
               <a:t>كَيْفَ نَتَصَرَّفُ بِاحْتِرَامٍ هُنَاكَ؟</a:t>
@@ -11632,6 +11730,7 @@
                   <a:srgbClr val="1B3B6F"/>
                 </a:solidFill>
                 <a:latin typeface="Amiri" pitchFamily="2" charset="-78"/>
+                <a:ea typeface="Amiri" pitchFamily="2" charset="-78"/>
                 <a:cs typeface="Amiri" pitchFamily="2" charset="-78"/>
               </a:rPr>
               <a:t>هَلْ يَجِبُ أَنْ نُغَطِّيَ رُؤُوسَنَا هُنَاكَ؟ وَمَتَى سَنَصِلُ؟</a:t>
@@ -11708,6 +11807,7 @@
                   <a:srgbClr val="1B3B6F"/>
                 </a:solidFill>
                 <a:latin typeface="Amiri" pitchFamily="2" charset="-78"/>
+                <a:ea typeface="Amiri" pitchFamily="2" charset="-78"/>
                 <a:cs typeface="Amiri" pitchFamily="2" charset="-78"/>
               </a:rPr>
               <a:t>سَنَزُورُ أَيْضًا مَعْبَدًا لِلسِّيخِ.</a:t>
@@ -11811,6 +11911,7 @@
                   <a:srgbClr val="1B3B6F"/>
                 </a:solidFill>
                 <a:latin typeface="Amiri" pitchFamily="2" charset="-78"/>
+                <a:ea typeface="Amiri" pitchFamily="2" charset="-78"/>
                 <a:cs typeface="Amiri" pitchFamily="2" charset="-78"/>
               </a:rPr>
               <a:t>لِأَنَّنَا نَتَعَلَّمُ عَنْ جِيرَانِنَا، وَالمَعْرِفَةُ تَبْنِي الاحْتِرَامَ.</a:t>
@@ -11887,6 +11988,7 @@
                   <a:srgbClr val="1B3B6F"/>
                 </a:solidFill>
                 <a:latin typeface="Amiri" pitchFamily="2" charset="-78"/>
+                <a:ea typeface="Amiri" pitchFamily="2" charset="-78"/>
                 <a:cs typeface="Amiri" pitchFamily="2" charset="-78"/>
               </a:rPr>
               <a:t>نَعَمْ، فِي العَاشِرَةِ. لِمَاذَا هٰذِهِ الزِّيَارَةُ مُفِيدَةٌ؟</a:t>
@@ -12096,6 +12198,7 @@
                   <a:srgbClr val="D4AF37"/>
                 </a:solidFill>
                 <a:latin typeface="Amiri" pitchFamily="2" charset="-78"/>
+                <a:ea typeface="Amiri" pitchFamily="2" charset="-78"/>
                 <a:cs typeface="Amiri" pitchFamily="2" charset="-78"/>
               </a:rPr>
               <a:t>م</a:t>
@@ -12416,6 +12519,7 @@
                   <a:srgbClr val="8A6D1E"/>
                 </a:solidFill>
                 <a:latin typeface="Amiri" pitchFamily="2" charset="-78"/>
+                <a:ea typeface="Amiri" pitchFamily="2" charset="-78"/>
                 <a:cs typeface="Amiri" pitchFamily="2" charset="-78"/>
               </a:rPr>
               <a:t>نَمُوذَجُ الإِجَابَةِ</a:t>
@@ -12658,6 +12762,7 @@
                   <a:srgbClr val="1B3B6F"/>
                 </a:solidFill>
                 <a:latin typeface="Amiri" pitchFamily="2" charset="-78"/>
+                <a:ea typeface="Amiri" pitchFamily="2" charset="-78"/>
                 <a:cs typeface="Amiri" pitchFamily="2" charset="-78"/>
               </a:rPr>
               <a:t>زُرْتُ الكَنِيسَ الَّذِي يُصَلِّي فِيهِ صَدِيقِي دَانِيَالُ، وَكَانَ ذٰلِكَ فِي احْتِفَالٍ بِعِيدٍ عِنْدَهُمْ.</a:t>
@@ -12734,6 +12839,7 @@
                   <a:srgbClr val="1B3B6F"/>
                 </a:solidFill>
                 <a:latin typeface="Amiri" pitchFamily="2" charset="-78"/>
+                <a:ea typeface="Amiri" pitchFamily="2" charset="-78"/>
                 <a:cs typeface="Amiri" pitchFamily="2" charset="-78"/>
               </a:rPr>
               <a:t>حَدِّثْنَا عَنْ زِيَارَتِكَ الأُولَى لِمَكَانِ عِبَادَةٍ آخَرَ.</a:t>
@@ -12837,6 +12943,7 @@
                   <a:srgbClr val="1B3B6F"/>
                 </a:solidFill>
                 <a:latin typeface="Amiri" pitchFamily="2" charset="-78"/>
+                <a:ea typeface="Amiri" pitchFamily="2" charset="-78"/>
                 <a:cs typeface="Amiri" pitchFamily="2" charset="-78"/>
               </a:rPr>
               <a:t>فِي وَسَطِ القَاعَةِ مِنْبَرٌ لِلْقِرَاءَةِ، وَأَمَامَهُ خِزَانَةٌ فِيهَا كُتُبُ التَّوْرَاةِ.</a:t>
@@ -12913,6 +13020,7 @@
                   <a:srgbClr val="1B3B6F"/>
                 </a:solidFill>
                 <a:latin typeface="Amiri" pitchFamily="2" charset="-78"/>
+                <a:ea typeface="Amiri" pitchFamily="2" charset="-78"/>
                 <a:cs typeface="Amiri" pitchFamily="2" charset="-78"/>
               </a:rPr>
               <a:t>مَاذَا رَأَيْتَ هُنَاكَ؟</a:t>
@@ -13016,6 +13124,7 @@
                   <a:srgbClr val="1B3B6F"/>
                 </a:solidFill>
                 <a:latin typeface="Amiri" pitchFamily="2" charset="-78"/>
+                <a:ea typeface="Amiri" pitchFamily="2" charset="-78"/>
                 <a:cs typeface="Amiri" pitchFamily="2" charset="-78"/>
               </a:rPr>
               <a:t>لَاحَظْتُ أَنَّ النَّاسَ يَخْلَعُونَ أَحْذِيَتَهُمْ فِي المَسْجِدِ، بَيْنَمَا يُغَطِّي الرِّجَالُ رُؤُوسَهُمْ فِي الكَنِيسِ؛ وَفِي المَكَانَيْنِ هُدُوءٌ وَاحْتِرَامٌ.</a:t>
@@ -13092,6 +13201,7 @@
                   <a:srgbClr val="1B3B6F"/>
                 </a:solidFill>
                 <a:latin typeface="Amiri" pitchFamily="2" charset="-78"/>
+                <a:ea typeface="Amiri" pitchFamily="2" charset="-78"/>
                 <a:cs typeface="Amiri" pitchFamily="2" charset="-78"/>
               </a:rPr>
               <a:t>هَلْ لَاحَظْتَ تَشَابُهًا مَعَ المَسْجِدِ؟</a:t>
@@ -13195,6 +13305,7 @@
                   <a:srgbClr val="1B3B6F"/>
                 </a:solidFill>
                 <a:latin typeface="Amiri" pitchFamily="2" charset="-78"/>
+                <a:ea typeface="Amiri" pitchFamily="2" charset="-78"/>
                 <a:cs typeface="Amiri" pitchFamily="2" charset="-78"/>
               </a:rPr>
               <a:t>تَعَلَّمْتُ أَنَّ أَسْئِلَتَنَا تُفْرِحُ الآخَرِينَ إِذَا كَانَتْ بِاحْتِرَامٍ؛ لِذٰلِكَ دَعَوْتُ دَانِيَالَ إِلَى مَسْجِدِنَا.</a:t>
@@ -13271,6 +13382,7 @@
                   <a:srgbClr val="1B3B6F"/>
                 </a:solidFill>
                 <a:latin typeface="Amiri" pitchFamily="2" charset="-78"/>
+                <a:ea typeface="Amiri" pitchFamily="2" charset="-78"/>
                 <a:cs typeface="Amiri" pitchFamily="2" charset="-78"/>
               </a:rPr>
               <a:t>مَا الَّذِي تَعَلَّمْتَهُ؟</a:t>
@@ -13374,6 +13486,7 @@
                   <a:srgbClr val="1B3B6F"/>
                 </a:solidFill>
                 <a:latin typeface="Amiri" pitchFamily="2" charset="-78"/>
+                <a:ea typeface="Amiri" pitchFamily="2" charset="-78"/>
                 <a:cs typeface="Amiri" pitchFamily="2" charset="-78"/>
               </a:rPr>
               <a:t>كَانَتْ رَائِعَةً؛ فَقَدْ شَاهَدَ صَلَاةَ الجُمُعَةِ مِنَ الخَلْفِ، وَسَأَلَ الإِمَامَ أَسْئِلَةً كَثِيرَةً، ثُمَّ أَكَلْنَا مَعًا.</a:t>
@@ -13450,6 +13563,7 @@
                   <a:srgbClr val="1B3B6F"/>
                 </a:solidFill>
                 <a:latin typeface="Amiri" pitchFamily="2" charset="-78"/>
+                <a:ea typeface="Amiri" pitchFamily="2" charset="-78"/>
                 <a:cs typeface="Amiri" pitchFamily="2" charset="-78"/>
               </a:rPr>
               <a:t>كَيْفَ كَانَتْ زِيَارَتُهُ لِلْمَسْجِدِ؟</a:t>
@@ -13659,6 +13773,7 @@
                   <a:srgbClr val="D4AF37"/>
                 </a:solidFill>
                 <a:latin typeface="Amiri" pitchFamily="2" charset="-78"/>
+                <a:ea typeface="Amiri" pitchFamily="2" charset="-78"/>
                 <a:cs typeface="Amiri" pitchFamily="2" charset="-78"/>
               </a:rPr>
               <a:t>م</a:t>
@@ -13979,6 +14094,7 @@
                   <a:srgbClr val="8A6D1E"/>
                 </a:solidFill>
                 <a:latin typeface="Amiri" pitchFamily="2" charset="-78"/>
+                <a:ea typeface="Amiri" pitchFamily="2" charset="-78"/>
                 <a:cs typeface="Amiri" pitchFamily="2" charset="-78"/>
               </a:rPr>
               <a:t>نَمُوذَجُ الإِجَابَةِ</a:t>
@@ -14221,6 +14337,7 @@
                   <a:srgbClr val="1B3B6F"/>
                 </a:solidFill>
                 <a:latin typeface="Amiri" pitchFamily="2" charset="-78"/>
+                <a:ea typeface="Amiri" pitchFamily="2" charset="-78"/>
                 <a:cs typeface="Amiri" pitchFamily="2" charset="-78"/>
               </a:rPr>
               <a:t>فِي مَدِينَتِنَا يَعِيشُ أَتْبَاعُ أَدْيَانٍ كَثِيرَةٍ؛ فَفِي شَارِعٍ وَاحِدٍ قُرْبَ بَيْتِي مَسْجِدٌ وَكَنِيسَةٌ وَمَعْبَدٌ هِنْدُوسِيٌّ.</a:t>
@@ -14297,6 +14414,7 @@
                   <a:srgbClr val="1B3B6F"/>
                 </a:solidFill>
                 <a:latin typeface="Amiri" pitchFamily="2" charset="-78"/>
+                <a:ea typeface="Amiri" pitchFamily="2" charset="-78"/>
                 <a:cs typeface="Amiri" pitchFamily="2" charset="-78"/>
               </a:rPr>
               <a:t>مَدِينَتُكُمْ مِنْ أَكْثَرِ المُدُنِ تَنَوُّعًا. كَيْفَ تَصِفُ ذٰلِكَ؟</a:t>
@@ -14400,6 +14518,7 @@
                   <a:srgbClr val="1B3B6F"/>
                 </a:solidFill>
                 <a:latin typeface="Amiri" pitchFamily="2" charset="-78"/>
+                <a:ea typeface="Amiri" pitchFamily="2" charset="-78"/>
                 <a:cs typeface="Amiri" pitchFamily="2" charset="-78"/>
               </a:rPr>
               <a:t>لَا، فَالاحْتِرَامُ لَيْسَ أَنْ نَتَّفِقَ فِي كُلِّ شَيْءٍ، بَلْ أَنْ نَعْتَرِفَ بِحَقِّ الآخَرِ فِي إِيمَانِهِ، وَأَنْ نَتَعَامَلَ مَعَهُ بِأَدَبٍ.</a:t>
@@ -14476,6 +14595,7 @@
                   <a:srgbClr val="1B3B6F"/>
                 </a:solidFill>
                 <a:latin typeface="Amiri" pitchFamily="2" charset="-78"/>
+                <a:ea typeface="Amiri" pitchFamily="2" charset="-78"/>
                 <a:cs typeface="Amiri" pitchFamily="2" charset="-78"/>
               </a:rPr>
               <a:t>هَلْ يَعْنِي هٰذَا أَنَّ الجَمِيعَ يَتَّفِقُونَ؟</a:t>
@@ -14579,6 +14699,7 @@
                   <a:srgbClr val="1B3B6F"/>
                 </a:solidFill>
                 <a:latin typeface="Amiri" pitchFamily="2" charset="-78"/>
+                <a:ea typeface="Amiri" pitchFamily="2" charset="-78"/>
                 <a:cs typeface="Amiri" pitchFamily="2" charset="-78"/>
               </a:rPr>
               <a:t>عِنْدَمَا حَدَثَ فَيَضَانٌ فِي الشِّتَاءِ المَاضِي، فَتَحَتِ الكَنِيسَةُ وَالمَسْجِدُ أَبْوَابَهُمَا لِلْعَائِلَاتِ، وَطَبَخَ المُتَطَوِّعُونَ مِنْ كُلِّ الأَدْيَانِ مَعًا.</a:t>
@@ -14655,6 +14776,7 @@
                   <a:srgbClr val="1B3B6F"/>
                 </a:solidFill>
                 <a:latin typeface="Amiri" pitchFamily="2" charset="-78"/>
+                <a:ea typeface="Amiri" pitchFamily="2" charset="-78"/>
                 <a:cs typeface="Amiri" pitchFamily="2" charset="-78"/>
               </a:rPr>
               <a:t>أَعْطِنَا مِثَالًا عَلَى التَّعَاوُنِ.</a:t>
@@ -14761,6 +14883,7 @@
                   <a:srgbClr val="1B3B6F"/>
                 </a:solidFill>
                 <a:latin typeface="Amiri" pitchFamily="2" charset="-78"/>
+                <a:ea typeface="Amiri" pitchFamily="2" charset="-78"/>
                 <a:cs typeface="Amiri" pitchFamily="2" charset="-78"/>
               </a:rPr>
               <a:t>صَحِيحٌ أَنَّ الخَوْفَ طَبِيعِيٌّ، غَيْرَ أَنَّهُ يَأْتِي غَالِبًا مِنْ قِلَّةِ المَعْرِفَةِ؛ لِذٰلِكَ أَقْتَرِحُ أَنْ تَفْتَحَ كُلُّ أَمَاكِنِ العِبَادَةِ أَبْوَابَهَا لِلزُّوَّارِ مَرَّةً فِي السَّنَةِ.</a:t>
@@ -14837,6 +14960,7 @@
                   <a:srgbClr val="1B3B6F"/>
                 </a:solidFill>
                 <a:latin typeface="Amiri" pitchFamily="2" charset="-78"/>
+                <a:ea typeface="Amiri" pitchFamily="2" charset="-78"/>
                 <a:cs typeface="Amiri" pitchFamily="2" charset="-78"/>
               </a:rPr>
               <a:t>لٰكِنَّ بَعْضَ النَّاسِ يَخَافُونَ مِنَ المُخْتَلِفِ.</a:t>
@@ -14940,6 +15064,7 @@
                   <a:srgbClr val="1B3B6F"/>
                 </a:solidFill>
                 <a:latin typeface="Amiri" pitchFamily="2" charset="-78"/>
+                <a:ea typeface="Amiri" pitchFamily="2" charset="-78"/>
                 <a:cs typeface="Amiri" pitchFamily="2" charset="-78"/>
               </a:rPr>
               <a:t>لَوْ طُلِبَ مِنِّي ذٰلِكَ، لَكَتَبْتُ: "نَحْنُ مُخْتَلِفُونَ فِي الصَّلَاةِ، وَمُتَّفِقُونَ عَلَى الإِنْسَانِيَّةِ".</a:t>
@@ -15019,6 +15144,7 @@
                   <a:srgbClr val="1B3B6F"/>
                 </a:solidFill>
                 <a:latin typeface="Amiri" pitchFamily="2" charset="-78"/>
+                <a:ea typeface="Amiri" pitchFamily="2" charset="-78"/>
                 <a:cs typeface="Amiri" pitchFamily="2" charset="-78"/>
               </a:rPr>
               <a:t>لَوْ طُلِبَ مِنْكَ أَنْ تَكْتُبَ رِسَالَةً وَاحِدَةً عَلَى جِدَارِ المَدِينَةِ، مَاذَا تَكْتُبُ؟</a:t>
@@ -15228,6 +15354,7 @@
                   <a:srgbClr val="D4AF37"/>
                 </a:solidFill>
                 <a:latin typeface="Amiri" pitchFamily="2" charset="-78"/>
+                <a:ea typeface="Amiri" pitchFamily="2" charset="-78"/>
                 <a:cs typeface="Amiri" pitchFamily="2" charset="-78"/>
               </a:rPr>
               <a:t>م</a:t>
@@ -15548,6 +15675,7 @@
                   <a:srgbClr val="8A6D1E"/>
                 </a:solidFill>
                 <a:latin typeface="Amiri" pitchFamily="2" charset="-78"/>
+                <a:ea typeface="Amiri" pitchFamily="2" charset="-78"/>
                 <a:cs typeface="Amiri" pitchFamily="2" charset="-78"/>
               </a:rPr>
               <a:t>أَمَاكِنُ العِبَادَةِ فِي حَيِّي</a:t>
@@ -15828,6 +15956,7 @@
                   <a:srgbClr val="1B3B6F"/>
                 </a:solidFill>
                 <a:latin typeface="Amiri" pitchFamily="2" charset="-78"/>
+                <a:ea typeface="Amiri" pitchFamily="2" charset="-78"/>
                 <a:cs typeface="Amiri" pitchFamily="2" charset="-78"/>
               </a:rPr>
               <a:t>نَعَمْ، فِي حَيِّي … / يُوجَدُ …</a:t>
@@ -15904,6 +16033,7 @@
                   <a:srgbClr val="1B3B6F"/>
                 </a:solidFill>
                 <a:latin typeface="Amiri" pitchFamily="2" charset="-78"/>
+                <a:ea typeface="Amiri" pitchFamily="2" charset="-78"/>
                 <a:cs typeface="Amiri" pitchFamily="2" charset="-78"/>
               </a:rPr>
               <a:t>هَلْ يُوجَدُ مَكَانٌ لِلْعِبَادَةِ فِي حَيِّكَ؟</a:t>
@@ -16072,6 +16202,7 @@
                   <a:srgbClr val="1B3B6F"/>
                 </a:solidFill>
                 <a:latin typeface="Amiri" pitchFamily="2" charset="-78"/>
+                <a:ea typeface="Amiri" pitchFamily="2" charset="-78"/>
                 <a:cs typeface="Amiri" pitchFamily="2" charset="-78"/>
               </a:rPr>
               <a:t>يَقَعُ بِجَانِبِ / أَمَامَ …</a:t>
@@ -16148,6 +16279,7 @@
                   <a:srgbClr val="1B3B6F"/>
                 </a:solidFill>
                 <a:latin typeface="Amiri" pitchFamily="2" charset="-78"/>
+                <a:ea typeface="Amiri" pitchFamily="2" charset="-78"/>
                 <a:cs typeface="Amiri" pitchFamily="2" charset="-78"/>
               </a:rPr>
               <a:t>أَيْنَ يَقَعُ؟</a:t>
@@ -16316,6 +16448,7 @@
                   <a:srgbClr val="1B3B6F"/>
                 </a:solidFill>
                 <a:latin typeface="Amiri" pitchFamily="2" charset="-78"/>
+                <a:ea typeface="Amiri" pitchFamily="2" charset="-78"/>
                 <a:cs typeface="Amiri" pitchFamily="2" charset="-78"/>
               </a:rPr>
               <a:t>هُوَ … وَلَهُ …</a:t>
@@ -16392,6 +16525,7 @@
                   <a:srgbClr val="1B3B6F"/>
                 </a:solidFill>
                 <a:latin typeface="Amiri" pitchFamily="2" charset="-78"/>
+                <a:ea typeface="Amiri" pitchFamily="2" charset="-78"/>
                 <a:cs typeface="Amiri" pitchFamily="2" charset="-78"/>
               </a:rPr>
               <a:t>صِفْ مَكَانًا لِلْعِبَادَةِ تَعْرِفُهُ.</a:t>
@@ -16560,6 +16694,7 @@
                   <a:srgbClr val="1B3B6F"/>
                 </a:solidFill>
                 <a:latin typeface="Amiri" pitchFamily="2" charset="-78"/>
+                <a:ea typeface="Amiri" pitchFamily="2" charset="-78"/>
                 <a:cs typeface="Amiri" pitchFamily="2" charset="-78"/>
               </a:rPr>
               <a:t>أَذْهَبُ … كُلَّ …</a:t>
@@ -16636,6 +16771,7 @@
                   <a:srgbClr val="1B3B6F"/>
                 </a:solidFill>
                 <a:latin typeface="Amiri" pitchFamily="2" charset="-78"/>
+                <a:ea typeface="Amiri" pitchFamily="2" charset="-78"/>
                 <a:cs typeface="Amiri" pitchFamily="2" charset="-78"/>
               </a:rPr>
               <a:t>مَتَى تَذْهَبُ إِلَى هُنَاكَ؟</a:t>
@@ -16804,6 +16940,7 @@
                   <a:srgbClr val="1B3B6F"/>
                 </a:solidFill>
                 <a:latin typeface="Amiri" pitchFamily="2" charset="-78"/>
+                <a:ea typeface="Amiri" pitchFamily="2" charset="-78"/>
                 <a:cs typeface="Amiri" pitchFamily="2" charset="-78"/>
               </a:rPr>
               <a:t>نَعَمْ، زُرْتُ … مَعَ …</a:t>
@@ -16880,6 +17017,7 @@
                   <a:srgbClr val="1B3B6F"/>
                 </a:solidFill>
                 <a:latin typeface="Amiri" pitchFamily="2" charset="-78"/>
+                <a:ea typeface="Amiri" pitchFamily="2" charset="-78"/>
                 <a:cs typeface="Amiri" pitchFamily="2" charset="-78"/>
               </a:rPr>
               <a:t>هَلْ زُرْتَ مَكَانَ عِبَادَةٍ لِدِينٍ آخَرَ؟</a:t>
@@ -17034,6 +17172,7 @@
                   <a:srgbClr val="1B3B6F"/>
                 </a:solidFill>
                 <a:latin typeface="Amiri" pitchFamily="2" charset="-78"/>
+                <a:ea typeface="Amiri" pitchFamily="2" charset="-78"/>
                 <a:cs typeface="Amiri" pitchFamily="2" charset="-78"/>
               </a:rPr>
               <a:t>عَفْوًا، هَلْ يُمْكِنُ أَنْ تُعِيدَ السُّؤَالَ؟</a:t>
@@ -17167,6 +17306,7 @@
                   <a:srgbClr val="D4AF37"/>
                 </a:solidFill>
                 <a:latin typeface="Amiri" pitchFamily="2" charset="-78"/>
+                <a:ea typeface="Amiri" pitchFamily="2" charset="-78"/>
                 <a:cs typeface="Amiri" pitchFamily="2" charset="-78"/>
               </a:rPr>
               <a:t>م</a:t>
@@ -17487,6 +17627,7 @@
                   <a:srgbClr val="8A6D1E"/>
                 </a:solidFill>
                 <a:latin typeface="Amiri" pitchFamily="2" charset="-78"/>
+                <a:ea typeface="Amiri" pitchFamily="2" charset="-78"/>
                 <a:cs typeface="Amiri" pitchFamily="2" charset="-78"/>
               </a:rPr>
               <a:t>الإِيمَانُ وَالحَيَاةُ اليَوْمِيَّةُ</a:t>
@@ -17767,6 +17908,7 @@
                   <a:srgbClr val="1B3B6F"/>
                 </a:solidFill>
                 <a:latin typeface="Amiri" pitchFamily="2" charset="-78"/>
+                <a:ea typeface="Amiri" pitchFamily="2" charset="-78"/>
                 <a:cs typeface="Amiri" pitchFamily="2" charset="-78"/>
               </a:rPr>
               <a:t>زُرْتُ … الَّذِي / الَّتِي … ؛ وَكَانَ …</a:t>
@@ -17843,6 +17985,7 @@
                   <a:srgbClr val="1B3B6F"/>
                 </a:solidFill>
                 <a:latin typeface="Amiri" pitchFamily="2" charset="-78"/>
+                <a:ea typeface="Amiri" pitchFamily="2" charset="-78"/>
                 <a:cs typeface="Amiri" pitchFamily="2" charset="-78"/>
               </a:rPr>
               <a:t>صِفْ مَكَانًا لِلْعِبَادَةِ زُرْتَهُ لِأَوَّلِ مَرَّةٍ.</a:t>
@@ -17946,6 +18089,7 @@
                   <a:srgbClr val="1B3B6F"/>
                 </a:solidFill>
                 <a:latin typeface="Amiri" pitchFamily="2" charset="-78"/>
+                <a:ea typeface="Amiri" pitchFamily="2" charset="-78"/>
                 <a:cs typeface="Amiri" pitchFamily="2" charset="-78"/>
               </a:rPr>
               <a:t>لَيْسَ … فَقَطْ، بَلْ …</a:t>
@@ -18022,6 +18166,7 @@
                   <a:srgbClr val="1B3B6F"/>
                 </a:solidFill>
                 <a:latin typeface="Amiri" pitchFamily="2" charset="-78"/>
+                <a:ea typeface="Amiri" pitchFamily="2" charset="-78"/>
                 <a:cs typeface="Amiri" pitchFamily="2" charset="-78"/>
               </a:rPr>
               <a:t>مَا دَوْرُ المَسْجِدِ أَوِ الكَنِيسَةِ فِي حَيِّكَ؟</a:t>
@@ -18125,6 +18270,7 @@
                   <a:srgbClr val="1B3B6F"/>
                 </a:solidFill>
                 <a:latin typeface="Amiri" pitchFamily="2" charset="-78"/>
+                <a:ea typeface="Amiri" pitchFamily="2" charset="-78"/>
                 <a:cs typeface="Amiri" pitchFamily="2" charset="-78"/>
               </a:rPr>
               <a:t>أَحْتَرِمُ … ؛ مَثَلًا …</a:t>
@@ -18201,6 +18347,7 @@
                   <a:srgbClr val="1B3B6F"/>
                 </a:solidFill>
                 <a:latin typeface="Amiri" pitchFamily="2" charset="-78"/>
+                <a:ea typeface="Amiri" pitchFamily="2" charset="-78"/>
                 <a:cs typeface="Amiri" pitchFamily="2" charset="-78"/>
               </a:rPr>
               <a:t>كَيْفَ تُظْهِرُ الاحْتِرَامَ لِأَدْيَانِ زُمَلَائِكَ؟</a:t>
@@ -18304,6 +18451,7 @@
                   <a:srgbClr val="1B3B6F"/>
                 </a:solidFill>
                 <a:latin typeface="Amiri" pitchFamily="2" charset="-78"/>
+                <a:ea typeface="Amiri" pitchFamily="2" charset="-78"/>
                 <a:cs typeface="Amiri" pitchFamily="2" charset="-78"/>
               </a:rPr>
               <a:t>كُنْتُ … أَمَّا الآنَ فَأَعْرِفُ …</a:t>
@@ -18380,6 +18528,7 @@
                   <a:srgbClr val="1B3B6F"/>
                 </a:solidFill>
                 <a:latin typeface="Amiri" pitchFamily="2" charset="-78"/>
+                <a:ea typeface="Amiri" pitchFamily="2" charset="-78"/>
                 <a:cs typeface="Amiri" pitchFamily="2" charset="-78"/>
               </a:rPr>
               <a:t>هَلْ تَغَيَّرَتْ مَعْرِفَتُكَ بِالأَدْيَانِ الأُخْرَى؟</a:t>
@@ -18483,6 +18632,7 @@
                   <a:srgbClr val="1B3B6F"/>
                 </a:solidFill>
                 <a:latin typeface="Amiri" pitchFamily="2" charset="-78"/>
+                <a:ea typeface="Amiri" pitchFamily="2" charset="-78"/>
                 <a:cs typeface="Amiri" pitchFamily="2" charset="-78"/>
               </a:rPr>
               <a:t>أَتَمَنَّى أَنْ أَزُورَ … لِأَنَّ …</a:t>
@@ -18559,6 +18709,7 @@
                   <a:srgbClr val="1B3B6F"/>
                 </a:solidFill>
                 <a:latin typeface="Amiri" pitchFamily="2" charset="-78"/>
+                <a:ea typeface="Amiri" pitchFamily="2" charset="-78"/>
                 <a:cs typeface="Amiri" pitchFamily="2" charset="-78"/>
               </a:rPr>
               <a:t>أَيُّ مَكَانٍ دِينِيٍّ تُرِيدُ أَنْ تَزُورَ فِي المُسْتَقْبَلِ؟</a:t>
@@ -18768,6 +18919,7 @@
                   <a:srgbClr val="D4AF37"/>
                 </a:solidFill>
                 <a:latin typeface="Amiri" pitchFamily="2" charset="-78"/>
+                <a:ea typeface="Amiri" pitchFamily="2" charset="-78"/>
                 <a:cs typeface="Amiri" pitchFamily="2" charset="-78"/>
               </a:rPr>
               <a:t>م</a:t>
@@ -19088,6 +19240,7 @@
                   <a:srgbClr val="8A6D1E"/>
                 </a:solidFill>
                 <a:latin typeface="Amiri" pitchFamily="2" charset="-78"/>
+                <a:ea typeface="Amiri" pitchFamily="2" charset="-78"/>
                 <a:cs typeface="Amiri" pitchFamily="2" charset="-78"/>
               </a:rPr>
               <a:t>الأَدْيَانُ وَالمُجْتَمَعُ</a:t>
@@ -19368,6 +19521,7 @@
                   <a:srgbClr val="1B3B6F"/>
                 </a:solidFill>
                 <a:latin typeface="Amiri" pitchFamily="2" charset="-78"/>
+                <a:ea typeface="Amiri" pitchFamily="2" charset="-78"/>
                 <a:cs typeface="Amiri" pitchFamily="2" charset="-78"/>
               </a:rPr>
               <a:t>إِنَّ المَعْرِفَةَ … ؛ فَإِذَا … فَلَنْ …</a:t>
@@ -19444,6 +19598,7 @@
                   <a:srgbClr val="1B3B6F"/>
                 </a:solidFill>
                 <a:latin typeface="Amiri" pitchFamily="2" charset="-78"/>
+                <a:ea typeface="Amiri" pitchFamily="2" charset="-78"/>
                 <a:cs typeface="Amiri" pitchFamily="2" charset="-78"/>
               </a:rPr>
               <a:t>لِمَاذَا مِنَ المُهِمِّ أَنْ نَتَعَلَّمَ عَنْ أَدْيَانٍ غَيْرِ دِينِنَا؟</a:t>
@@ -19547,6 +19702,7 @@
                   <a:srgbClr val="1B3B6F"/>
                 </a:solidFill>
                 <a:latin typeface="Amiri" pitchFamily="2" charset="-78"/>
+                <a:ea typeface="Amiri" pitchFamily="2" charset="-78"/>
                 <a:cs typeface="Amiri" pitchFamily="2" charset="-78"/>
               </a:rPr>
               <a:t>مِنْ نَاحِيَةٍ … وَمِنْ نَاحِيَةٍ أُخْرَى …</a:t>
@@ -19623,6 +19779,7 @@
                   <a:srgbClr val="1B3B6F"/>
                 </a:solidFill>
                 <a:latin typeface="Amiri" pitchFamily="2" charset="-78"/>
+                <a:ea typeface="Amiri" pitchFamily="2" charset="-78"/>
                 <a:cs typeface="Amiri" pitchFamily="2" charset="-78"/>
               </a:rPr>
               <a:t>هَلْ مَا زَالَ لِأَمَاكِنِ العِبَادَةِ دَوْرٌ فِي حَيَاةِ الشَّبَابِ؟</a:t>
@@ -19726,6 +19883,7 @@
                   <a:srgbClr val="1B3B6F"/>
                 </a:solidFill>
                 <a:latin typeface="Amiri" pitchFamily="2" charset="-78"/>
+                <a:ea typeface="Amiri" pitchFamily="2" charset="-78"/>
                 <a:cs typeface="Amiri" pitchFamily="2" charset="-78"/>
               </a:rPr>
               <a:t>كَانَ أَجْدَادِي … أَمَّا جِيلُنَا فَيَدْرُسُ …</a:t>
@@ -19802,6 +19960,7 @@
                   <a:srgbClr val="1B3B6F"/>
                 </a:solidFill>
                 <a:latin typeface="Amiri" pitchFamily="2" charset="-78"/>
+                <a:ea typeface="Amiri" pitchFamily="2" charset="-78"/>
                 <a:cs typeface="Amiri" pitchFamily="2" charset="-78"/>
               </a:rPr>
               <a:t>كَيْفَ كَانَ جِيلُ أَجْدَادِكَ يَنْظُرُ إِلَى الأَدْيَانِ الأُخْرَى؟</a:t>
@@ -19905,6 +20064,7 @@
                   <a:srgbClr val="1B3B6F"/>
                 </a:solidFill>
                 <a:latin typeface="Amiri" pitchFamily="2" charset="-78"/>
+                <a:ea typeface="Amiri" pitchFamily="2" charset="-78"/>
                 <a:cs typeface="Amiri" pitchFamily="2" charset="-78"/>
               </a:rPr>
               <a:t>صَحِيحٌ أَنَّ … غَيْرَ أَنَّ …</a:t>
@@ -19981,6 +20141,7 @@
                   <a:srgbClr val="1B3B6F"/>
                 </a:solidFill>
                 <a:latin typeface="Amiri" pitchFamily="2" charset="-78"/>
+                <a:ea typeface="Amiri" pitchFamily="2" charset="-78"/>
                 <a:cs typeface="Amiri" pitchFamily="2" charset="-78"/>
               </a:rPr>
               <a:t>هَلْ يَجِبُ أَنْ تَحْتَرِمَ المَدَارِسُ المُنَاسَبَاتِ الدِّينِيَّةَ لِلطُّلَّابِ؟</a:t>
@@ -20084,6 +20245,7 @@
                   <a:srgbClr val="1B3B6F"/>
                 </a:solidFill>
                 <a:latin typeface="Amiri" pitchFamily="2" charset="-78"/>
+                <a:ea typeface="Amiri" pitchFamily="2" charset="-78"/>
                 <a:cs typeface="Amiri" pitchFamily="2" charset="-78"/>
               </a:rPr>
               <a:t>لَوْ صَمَّمْتُهُ، لَجَعَلْتُهُ …</a:t>
@@ -20160,6 +20322,7 @@
                   <a:srgbClr val="1B3B6F"/>
                 </a:solidFill>
                 <a:latin typeface="Amiri" pitchFamily="2" charset="-78"/>
+                <a:ea typeface="Amiri" pitchFamily="2" charset="-78"/>
                 <a:cs typeface="Amiri" pitchFamily="2" charset="-78"/>
               </a:rPr>
               <a:t>لَوْ صَمَّمْتَ مَكَانًا يَجْمَعُ النَّاسَ مِنْ كُلِّ الأَدْيَانِ، كَيْفَ يَكُونُ؟</a:t>
@@ -20369,6 +20532,7 @@
                   <a:srgbClr val="D4AF37"/>
                 </a:solidFill>
                 <a:latin typeface="Amiri" pitchFamily="2" charset="-78"/>
+                <a:ea typeface="Amiri" pitchFamily="2" charset="-78"/>
                 <a:cs typeface="Amiri" pitchFamily="2" charset="-78"/>
               </a:rPr>
               <a:t>م</a:t>
@@ -20689,6 +20853,7 @@
                   <a:srgbClr val="8A6D1E"/>
                 </a:solidFill>
                 <a:latin typeface="Amiri" pitchFamily="2" charset="-78"/>
+                <a:ea typeface="Amiri" pitchFamily="2" charset="-78"/>
                 <a:cs typeface="Amiri" pitchFamily="2" charset="-78"/>
               </a:rPr>
               <a:t>آدَابُ الصَّفِّ</a:t>
@@ -22220,6 +22385,7 @@
                   <a:srgbClr val="D4AF37"/>
                 </a:solidFill>
                 <a:latin typeface="Amiri" pitchFamily="2" charset="-78"/>
+                <a:ea typeface="Amiri" pitchFamily="2" charset="-78"/>
                 <a:cs typeface="Amiri" pitchFamily="2" charset="-78"/>
               </a:rPr>
               <a:t>م</a:t>
@@ -22540,6 +22706,7 @@
                   <a:srgbClr val="8A6D1E"/>
                 </a:solidFill>
                 <a:latin typeface="Amiri" pitchFamily="2" charset="-78"/>
+                <a:ea typeface="Amiri" pitchFamily="2" charset="-78"/>
                 <a:cs typeface="Amiri" pitchFamily="2" charset="-78"/>
               </a:rPr>
               <a:t>نَمُوذَجُ الإِجَابَةِ</a:t>
@@ -22782,6 +22949,7 @@
                   <a:srgbClr val="1B3B6F"/>
                 </a:solidFill>
                 <a:latin typeface="Amiri" pitchFamily="2" charset="-78"/>
+                <a:ea typeface="Amiri" pitchFamily="2" charset="-78"/>
                 <a:cs typeface="Amiri" pitchFamily="2" charset="-78"/>
               </a:rPr>
               <a:t>نَعَمْ، فِي حَيِّي مَسْجِدٌ كَبِيرٌ وَكَنِيسَةٌ قَدِيمَةٌ.</a:t>
@@ -22858,6 +23026,7 @@
                   <a:srgbClr val="1B3B6F"/>
                 </a:solidFill>
                 <a:latin typeface="Amiri" pitchFamily="2" charset="-78"/>
+                <a:ea typeface="Amiri" pitchFamily="2" charset="-78"/>
                 <a:cs typeface="Amiri" pitchFamily="2" charset="-78"/>
               </a:rPr>
               <a:t>هَلْ يُوجَدُ مَكَانٌ لِلْعِبَادَةِ فِي حَيِّكَ؟</a:t>
@@ -22961,6 +23130,7 @@
                   <a:srgbClr val="1B3B6F"/>
                 </a:solidFill>
                 <a:latin typeface="Amiri" pitchFamily="2" charset="-78"/>
+                <a:ea typeface="Amiri" pitchFamily="2" charset="-78"/>
                 <a:cs typeface="Amiri" pitchFamily="2" charset="-78"/>
               </a:rPr>
               <a:t>يَقَعُ المَسْجِدُ أَمَامَ الحَدِيقَةِ.</a:t>
@@ -23037,6 +23207,7 @@
                   <a:srgbClr val="1B3B6F"/>
                 </a:solidFill>
                 <a:latin typeface="Amiri" pitchFamily="2" charset="-78"/>
+                <a:ea typeface="Amiri" pitchFamily="2" charset="-78"/>
                 <a:cs typeface="Amiri" pitchFamily="2" charset="-78"/>
               </a:rPr>
               <a:t>أَيْنَ يَقَعُ؟</a:t>
@@ -23140,6 +23311,7 @@
                   <a:srgbClr val="1B3B6F"/>
                 </a:solidFill>
                 <a:latin typeface="Amiri" pitchFamily="2" charset="-78"/>
+                <a:ea typeface="Amiri" pitchFamily="2" charset="-78"/>
                 <a:cs typeface="Amiri" pitchFamily="2" charset="-78"/>
               </a:rPr>
               <a:t>هُوَ جَمِيلٌ وَوَاسِعٌ، وَلَهُ مِئْذَنَةٌ بَيْضَاءُ.</a:t>
@@ -23216,6 +23388,7 @@
                   <a:srgbClr val="1B3B6F"/>
                 </a:solidFill>
                 <a:latin typeface="Amiri" pitchFamily="2" charset="-78"/>
+                <a:ea typeface="Amiri" pitchFamily="2" charset="-78"/>
                 <a:cs typeface="Amiri" pitchFamily="2" charset="-78"/>
               </a:rPr>
               <a:t>صِفْ مَكَانًا لِلْعِبَادَةِ تَعْرِفُهُ.</a:t>
@@ -23319,6 +23492,7 @@
                   <a:srgbClr val="1B3B6F"/>
                 </a:solidFill>
                 <a:latin typeface="Amiri" pitchFamily="2" charset="-78"/>
+                <a:ea typeface="Amiri" pitchFamily="2" charset="-78"/>
                 <a:cs typeface="Amiri" pitchFamily="2" charset="-78"/>
               </a:rPr>
               <a:t>أَذْهَبُ إِلَى المَسْجِدِ كُلَّ يَوْمِ جُمُعَةٍ مَعَ أَبِي.</a:t>
@@ -23395,6 +23569,7 @@
                   <a:srgbClr val="1B3B6F"/>
                 </a:solidFill>
                 <a:latin typeface="Amiri" pitchFamily="2" charset="-78"/>
+                <a:ea typeface="Amiri" pitchFamily="2" charset="-78"/>
                 <a:cs typeface="Amiri" pitchFamily="2" charset="-78"/>
               </a:rPr>
               <a:t>مَتَى تَذْهَبُ إِلَى هُنَاكَ؟</a:t>
@@ -23498,6 +23673,7 @@
                   <a:srgbClr val="1B3B6F"/>
                 </a:solidFill>
                 <a:latin typeface="Amiri" pitchFamily="2" charset="-78"/>
+                <a:ea typeface="Amiri" pitchFamily="2" charset="-78"/>
                 <a:cs typeface="Amiri" pitchFamily="2" charset="-78"/>
               </a:rPr>
               <a:t>نَعَمْ، زُرْتُ كَاتِدْرَائِيَّةً مَعَ المَدْرَسَةِ.</a:t>
@@ -23574,6 +23750,7 @@
                   <a:srgbClr val="1B3B6F"/>
                 </a:solidFill>
                 <a:latin typeface="Amiri" pitchFamily="2" charset="-78"/>
+                <a:ea typeface="Amiri" pitchFamily="2" charset="-78"/>
                 <a:cs typeface="Amiri" pitchFamily="2" charset="-78"/>
               </a:rPr>
               <a:t>هَلْ زُرْتَ مَكَانَ عِبَادَةٍ لِدِينٍ آخَرَ؟</a:t>
@@ -23783,6 +23960,7 @@
                   <a:srgbClr val="D4AF37"/>
                 </a:solidFill>
                 <a:latin typeface="Amiri" pitchFamily="2" charset="-78"/>
+                <a:ea typeface="Amiri" pitchFamily="2" charset="-78"/>
                 <a:cs typeface="Amiri" pitchFamily="2" charset="-78"/>
               </a:rPr>
               <a:t>م</a:t>
@@ -24103,6 +24281,7 @@
                   <a:srgbClr val="8A6D1E"/>
                 </a:solidFill>
                 <a:latin typeface="Amiri" pitchFamily="2" charset="-78"/>
+                <a:ea typeface="Amiri" pitchFamily="2" charset="-78"/>
                 <a:cs typeface="Amiri" pitchFamily="2" charset="-78"/>
               </a:rPr>
               <a:t>نَمُوذَجُ الإِجَابَةِ</a:t>
@@ -24345,6 +24524,7 @@
                   <a:srgbClr val="1B3B6F"/>
                 </a:solidFill>
                 <a:latin typeface="Amiri" pitchFamily="2" charset="-78"/>
+                <a:ea typeface="Amiri" pitchFamily="2" charset="-78"/>
                 <a:cs typeface="Amiri" pitchFamily="2" charset="-78"/>
               </a:rPr>
               <a:t>زُرْتُ المَعْبَدَ الهِنْدُوسِيَّ الَّذِي فِي وَسَطِ المَدِينَةِ؛ وَكَانَ مَلِيئًا بِالأَلْوَانِ وَالزُّهُورِ، وَاسْتَقْبَلَنَا الكَاهِنُ بِلُطْفٍ.</a:t>
@@ -24421,6 +24601,7 @@
                   <a:srgbClr val="1B3B6F"/>
                 </a:solidFill>
                 <a:latin typeface="Amiri" pitchFamily="2" charset="-78"/>
+                <a:ea typeface="Amiri" pitchFamily="2" charset="-78"/>
                 <a:cs typeface="Amiri" pitchFamily="2" charset="-78"/>
               </a:rPr>
               <a:t>صِفْ مَكَانًا لِلْعِبَادَةِ زُرْتَهُ لِأَوَّلِ مَرَّةٍ.</a:t>
@@ -24524,6 +24705,7 @@
                   <a:srgbClr val="1B3B6F"/>
                 </a:solidFill>
                 <a:latin typeface="Amiri" pitchFamily="2" charset="-78"/>
+                <a:ea typeface="Amiri" pitchFamily="2" charset="-78"/>
                 <a:cs typeface="Amiri" pitchFamily="2" charset="-78"/>
               </a:rPr>
               <a:t>لَيْسَ لِلصَّلَاةِ فَقَطْ، بَلْ فِيهِ دُرُوسٌ لِلْأَطْفَالِ، وَبَنْكٌ لِلطَّعَامِ يُسَاعِدُ العَائِلَاتِ المُحْتَاجَةَ.</a:t>
@@ -24600,6 +24782,7 @@
                   <a:srgbClr val="1B3B6F"/>
                 </a:solidFill>
                 <a:latin typeface="Amiri" pitchFamily="2" charset="-78"/>
+                <a:ea typeface="Amiri" pitchFamily="2" charset="-78"/>
                 <a:cs typeface="Amiri" pitchFamily="2" charset="-78"/>
               </a:rPr>
               <a:t>مَا دَوْرُ المَسْجِدِ أَوِ الكَنِيسَةِ فِي حَيِّكَ؟</a:t>
@@ -24703,6 +24886,7 @@
                   <a:srgbClr val="1B3B6F"/>
                 </a:solidFill>
                 <a:latin typeface="Amiri" pitchFamily="2" charset="-78"/>
+                <a:ea typeface="Amiri" pitchFamily="2" charset="-78"/>
                 <a:cs typeface="Amiri" pitchFamily="2" charset="-78"/>
               </a:rPr>
               <a:t>أَحْتَرِمُ أَعْيَادَهُمْ؛ مَثَلًا، أُهَنِّئُ صَدِيقِي السِّيخِيَّ بِعِيدِهِ، وَهُوَ يُهَنِّئُنِي بِرَمَضَانَ.</a:t>
@@ -24779,6 +24963,7 @@
                   <a:srgbClr val="1B3B6F"/>
                 </a:solidFill>
                 <a:latin typeface="Amiri" pitchFamily="2" charset="-78"/>
+                <a:ea typeface="Amiri" pitchFamily="2" charset="-78"/>
                 <a:cs typeface="Amiri" pitchFamily="2" charset="-78"/>
               </a:rPr>
               <a:t>كَيْفَ تُظْهِرُ الاحْتِرَامَ لِأَدْيَانِ زُمَلَائِكَ؟</a:t>
@@ -24882,6 +25067,7 @@
                   <a:srgbClr val="1B3B6F"/>
                 </a:solidFill>
                 <a:latin typeface="Amiri" pitchFamily="2" charset="-78"/>
+                <a:ea typeface="Amiri" pitchFamily="2" charset="-78"/>
                 <a:cs typeface="Amiri" pitchFamily="2" charset="-78"/>
               </a:rPr>
               <a:t>كُنْتُ لَا أَعْرِفُ شَيْئًا عَنْهَا، أَمَّا الآنَ فَأَعْرِفُ الكَثِيرَ بِفَضْلِ دُرُوسِ الدِّرَاسَاتِ الدِّينِيَّةِ وَالزِّيَارَاتِ.</a:t>
@@ -24958,6 +25144,7 @@
                   <a:srgbClr val="1B3B6F"/>
                 </a:solidFill>
                 <a:latin typeface="Amiri" pitchFamily="2" charset="-78"/>
+                <a:ea typeface="Amiri" pitchFamily="2" charset="-78"/>
                 <a:cs typeface="Amiri" pitchFamily="2" charset="-78"/>
               </a:rPr>
               <a:t>هَلْ تَغَيَّرَتْ مَعْرِفَتُكَ بِالأَدْيَانِ الأُخْرَى؟</a:t>
@@ -25061,6 +25248,7 @@
                   <a:srgbClr val="1B3B6F"/>
                 </a:solidFill>
                 <a:latin typeface="Amiri" pitchFamily="2" charset="-78"/>
+                <a:ea typeface="Amiri" pitchFamily="2" charset="-78"/>
                 <a:cs typeface="Amiri" pitchFamily="2" charset="-78"/>
               </a:rPr>
               <a:t>أَتَمَنَّى أَنْ أَزُورَ المَسْجِدَ الأَقْصَى فِي القُدْسِ، لِأَنَّهُ مِنْ أَقْدَسِ الأَمَاكِنِ عِنْدَ المُسْلِمِينَ، وَلِأَنَّ المَدِينَةَ مُقَدَّسَةٌ لِأَدْيَانٍ ثَلَاثَةٍ.</a:t>
@@ -25137,6 +25325,7 @@
                   <a:srgbClr val="1B3B6F"/>
                 </a:solidFill>
                 <a:latin typeface="Amiri" pitchFamily="2" charset="-78"/>
+                <a:ea typeface="Amiri" pitchFamily="2" charset="-78"/>
                 <a:cs typeface="Amiri" pitchFamily="2" charset="-78"/>
               </a:rPr>
               <a:t>أَيُّ مَكَانٍ دِينِيٍّ تُرِيدُ أَنْ تَزُورَ فِي المُسْتَقْبَلِ؟</a:t>
@@ -25346,6 +25535,7 @@
                   <a:srgbClr val="D4AF37"/>
                 </a:solidFill>
                 <a:latin typeface="Amiri" pitchFamily="2" charset="-78"/>
+                <a:ea typeface="Amiri" pitchFamily="2" charset="-78"/>
                 <a:cs typeface="Amiri" pitchFamily="2" charset="-78"/>
               </a:rPr>
               <a:t>م</a:t>
@@ -25666,6 +25856,7 @@
                   <a:srgbClr val="8A6D1E"/>
                 </a:solidFill>
                 <a:latin typeface="Amiri" pitchFamily="2" charset="-78"/>
+                <a:ea typeface="Amiri" pitchFamily="2" charset="-78"/>
                 <a:cs typeface="Amiri" pitchFamily="2" charset="-78"/>
               </a:rPr>
               <a:t>نَمُوذَجُ الإِجَابَةِ</a:t>
@@ -25908,6 +26099,7 @@
                   <a:srgbClr val="1B3B6F"/>
                 </a:solidFill>
                 <a:latin typeface="Amiri" pitchFamily="2" charset="-78"/>
+                <a:ea typeface="Amiri" pitchFamily="2" charset="-78"/>
                 <a:cs typeface="Amiri" pitchFamily="2" charset="-78"/>
               </a:rPr>
               <a:t>إِنَّ المَعْرِفَةَ أَسَاسُ الاحْتِرَامِ؛ فَإِذَا فَهِمْتُ لِمَاذَا يَصُومُ جَارِي أَوْ يُصَلِّي، فَلَنْ أَحْكُمَ عَلَيْهِ مِنْ خِلَالِ الصُّوَرِ النَّمَطِيَّةِ.</a:t>
@@ -25987,6 +26179,7 @@
                   <a:srgbClr val="1B3B6F"/>
                 </a:solidFill>
                 <a:latin typeface="Amiri" pitchFamily="2" charset="-78"/>
+                <a:ea typeface="Amiri" pitchFamily="2" charset="-78"/>
                 <a:cs typeface="Amiri" pitchFamily="2" charset="-78"/>
               </a:rPr>
               <a:t>لِمَاذَا مِنَ المُهِمِّ أَنْ نَتَعَلَّمَ عَنْ أَدْيَانٍ غَيْرِ دِينِنَا؟</a:t>
@@ -26093,6 +26286,7 @@
                   <a:srgbClr val="1B3B6F"/>
                 </a:solidFill>
                 <a:latin typeface="Amiri" pitchFamily="2" charset="-78"/>
+                <a:ea typeface="Amiri" pitchFamily="2" charset="-78"/>
                 <a:cs typeface="Amiri" pitchFamily="2" charset="-78"/>
               </a:rPr>
               <a:t>مِنْ نَاحِيَةٍ، يَقْضِي الشَّبَابُ وَقْتًا أَطْوَلَ عَلَى الإِنْتَرْنِتِ، وَمِنْ نَاحِيَةٍ أُخْرَى، تُقَدِّمُ أَمَاكِنُ العِبَادَةِ نَوَادِيَ وَأَنْشِطَةً تَطَوُّعِيَّةً تَجْذِبُهُمْ وَتَمْنَحُهُمْ مُجْتَمَعًا حَقِيقِيًّا.</a:t>
@@ -26172,6 +26366,7 @@
                   <a:srgbClr val="1B3B6F"/>
                 </a:solidFill>
                 <a:latin typeface="Amiri" pitchFamily="2" charset="-78"/>
+                <a:ea typeface="Amiri" pitchFamily="2" charset="-78"/>
                 <a:cs typeface="Amiri" pitchFamily="2" charset="-78"/>
               </a:rPr>
               <a:t>هَلْ مَا زَالَ لِأَمَاكِنِ العِبَادَةِ دَوْرٌ فِي حَيَاةِ الشَّبَابِ؟</a:t>
@@ -26278,6 +26473,7 @@
                   <a:srgbClr val="1B3B6F"/>
                 </a:solidFill>
                 <a:latin typeface="Amiri" pitchFamily="2" charset="-78"/>
+                <a:ea typeface="Amiri" pitchFamily="2" charset="-78"/>
                 <a:cs typeface="Amiri" pitchFamily="2" charset="-78"/>
               </a:rPr>
               <a:t>كَانَ أَجْدَادِي يَعِيشُونَ فِي قَرْيَةٍ كُلُّ سُكَّانِهَا مُسْلِمُونَ، أَمَّا جِيلُنَا فَيَدْرُسُ وَيَلْعَبُ مَعَ أَتْبَاعِ أَدْيَانٍ كَثِيرَةٍ، مِمَّا يَجْعَلُ الاحْتِرَامَ جُزْءًا مِنْ حَيَاتِنَا اليَوْمِيَّةِ.</a:t>
@@ -26357,6 +26553,7 @@
                   <a:srgbClr val="1B3B6F"/>
                 </a:solidFill>
                 <a:latin typeface="Amiri" pitchFamily="2" charset="-78"/>
+                <a:ea typeface="Amiri" pitchFamily="2" charset="-78"/>
                 <a:cs typeface="Amiri" pitchFamily="2" charset="-78"/>
               </a:rPr>
               <a:t>كَيْفَ كَانَ جِيلُ أَجْدَادِكَ يَنْظُرُ إِلَى الأَدْيَانِ الأُخْرَى؟</a:t>
@@ -26566,6 +26763,7 @@
                   <a:srgbClr val="D4AF37"/>
                 </a:solidFill>
                 <a:latin typeface="Amiri" pitchFamily="2" charset="-78"/>
+                <a:ea typeface="Amiri" pitchFamily="2" charset="-78"/>
                 <a:cs typeface="Amiri" pitchFamily="2" charset="-78"/>
               </a:rPr>
               <a:t>م</a:t>
@@ -26886,6 +27084,7 @@
                   <a:srgbClr val="8A6D1E"/>
                 </a:solidFill>
                 <a:latin typeface="Amiri" pitchFamily="2" charset="-78"/>
+                <a:ea typeface="Amiri" pitchFamily="2" charset="-78"/>
                 <a:cs typeface="Amiri" pitchFamily="2" charset="-78"/>
               </a:rPr>
               <a:t>نَمُوذَجُ الإِجَابَةِ</a:t>
@@ -27131,6 +27330,7 @@
                   <a:srgbClr val="1B3B6F"/>
                 </a:solidFill>
                 <a:latin typeface="Amiri" pitchFamily="2" charset="-78"/>
+                <a:ea typeface="Amiri" pitchFamily="2" charset="-78"/>
                 <a:cs typeface="Amiri" pitchFamily="2" charset="-78"/>
               </a:rPr>
               <a:t>صَحِيحٌ أَنَّ المَدْرَسَةَ لَا تَسْتَطِيعُ أَنْ تُعْطِيَ عُطْلَةً لِكُلِّ عِيدٍ، غَيْرَ أَنَّهَا تَسْتَطِيعُ أَلَّا تَضَعَ الامْتِحَانَاتِ فِي الأَعْيَادِ الكُبْرَى، وَأَنْ تُوَفِّرَ غُرْفَةً لِلصَّلَاةِ.</a:t>
@@ -27210,6 +27410,7 @@
                   <a:srgbClr val="1B3B6F"/>
                 </a:solidFill>
                 <a:latin typeface="Amiri" pitchFamily="2" charset="-78"/>
+                <a:ea typeface="Amiri" pitchFamily="2" charset="-78"/>
                 <a:cs typeface="Amiri" pitchFamily="2" charset="-78"/>
               </a:rPr>
               <a:t>هَلْ يَجِبُ أَنْ تَحْتَرِمَ المَدَارِسُ المُنَاسَبَاتِ الدِّينِيَّةَ لِلطُّلَّابِ؟</a:t>
@@ -27313,6 +27514,7 @@
                   <a:srgbClr val="1B3B6F"/>
                 </a:solidFill>
                 <a:latin typeface="Amiri" pitchFamily="2" charset="-78"/>
+                <a:ea typeface="Amiri" pitchFamily="2" charset="-78"/>
                 <a:cs typeface="Amiri" pitchFamily="2" charset="-78"/>
               </a:rPr>
               <a:t>لَوْ صَمَّمْتُهُ، لَجَعَلْتُهُ حَدِيقَةً كَبِيرَةً فِيهَا مَكْتَبَةٌ وَمَطْبَخٌ مُشْتَرَكٌ، لِأَنَّ النَّاسَ يَتَعَارَفُونَ حِينَ يَقْرَؤُونَ وَيَأْكُلُونَ مَعًا.</a:t>
@@ -27392,6 +27594,7 @@
                   <a:srgbClr val="1B3B6F"/>
                 </a:solidFill>
                 <a:latin typeface="Amiri" pitchFamily="2" charset="-78"/>
+                <a:ea typeface="Amiri" pitchFamily="2" charset="-78"/>
                 <a:cs typeface="Amiri" pitchFamily="2" charset="-78"/>
               </a:rPr>
               <a:t>لَوْ صَمَّمْتَ مَكَانًا يَجْمَعُ النَّاسَ مِنْ كُلِّ الأَدْيَانِ، كَيْفَ يَكُونُ؟</a:t>
@@ -27601,6 +27804,7 @@
                   <a:srgbClr val="D4AF37"/>
                 </a:solidFill>
                 <a:latin typeface="Amiri" pitchFamily="2" charset="-78"/>
+                <a:ea typeface="Amiri" pitchFamily="2" charset="-78"/>
                 <a:cs typeface="Amiri" pitchFamily="2" charset="-78"/>
               </a:rPr>
               <a:t>م</a:t>
@@ -27921,6 +28125,7 @@
                   <a:srgbClr val="8A6D1E"/>
                 </a:solidFill>
                 <a:latin typeface="Amiri" pitchFamily="2" charset="-78"/>
+                <a:ea typeface="Amiri" pitchFamily="2" charset="-78"/>
                 <a:cs typeface="Amiri" pitchFamily="2" charset="-78"/>
               </a:rPr>
               <a:t>قَيِّمْ عَمَلَكَ</a:t>
@@ -29165,6 +29370,7 @@
                   <a:srgbClr val="FFFFFF"/>
                 </a:solidFill>
                 <a:latin typeface="Amiri" pitchFamily="2" charset="-78"/>
+                <a:ea typeface="Amiri" pitchFamily="2" charset="-78"/>
                 <a:cs typeface="Amiri" pitchFamily="2" charset="-78"/>
               </a:rPr>
               <a:t>أَحْسَنْتُمْ! إِلَى اللِّقَاءِ</a:t>
@@ -29317,6 +29523,7 @@
                   <a:srgbClr val="D4AF37"/>
                 </a:solidFill>
                 <a:latin typeface="Amiri" pitchFamily="2" charset="-78"/>
+                <a:ea typeface="Amiri" pitchFamily="2" charset="-78"/>
                 <a:cs typeface="Amiri" pitchFamily="2" charset="-78"/>
               </a:rPr>
               <a:t>وَرْشَةُ الكِتَابَةِ</a:t>
@@ -29450,6 +29657,7 @@
                   <a:srgbClr val="D4AF37"/>
                 </a:solidFill>
                 <a:latin typeface="Amiri" pitchFamily="2" charset="-78"/>
+                <a:ea typeface="Amiri" pitchFamily="2" charset="-78"/>
                 <a:cs typeface="Amiri" pitchFamily="2" charset="-78"/>
               </a:rPr>
               <a:t>م</a:t>
@@ -29770,6 +29978,7 @@
                   <a:srgbClr val="8A6D1E"/>
                 </a:solidFill>
                 <a:latin typeface="Amiri" pitchFamily="2" charset="-78"/>
+                <a:ea typeface="Amiri" pitchFamily="2" charset="-78"/>
                 <a:cs typeface="Amiri" pitchFamily="2" charset="-78"/>
               </a:rPr>
               <a:t>خَرِيطَةُ الوَرْشَةِ</a:t>
@@ -30084,6 +30293,7 @@
                   <a:srgbClr val="1B3B6F"/>
                 </a:solidFill>
                 <a:latin typeface="Amiri" pitchFamily="2" charset="-78"/>
+                <a:ea typeface="Amiri" pitchFamily="2" charset="-78"/>
                 <a:cs typeface="Amiri" pitchFamily="2" charset="-78"/>
               </a:rPr>
               <a:t>كَيْفَ</a:t>
@@ -30360,6 +30570,7 @@
                   <a:srgbClr val="1E6B52"/>
                 </a:solidFill>
                 <a:latin typeface="Amiri" pitchFamily="2" charset="-78"/>
+                <a:ea typeface="Amiri" pitchFamily="2" charset="-78"/>
                 <a:cs typeface="Amiri" pitchFamily="2" charset="-78"/>
               </a:rPr>
               <a:t>تَمْثِيلُ الدَّوْرِ</a:t>
@@ -30636,6 +30847,7 @@
                   <a:srgbClr val="8A6D1E"/>
                 </a:solidFill>
                 <a:latin typeface="Amiri" pitchFamily="2" charset="-78"/>
+                <a:ea typeface="Amiri" pitchFamily="2" charset="-78"/>
                 <a:cs typeface="Amiri" pitchFamily="2" charset="-78"/>
               </a:rPr>
               <a:t>النَّمُوذَجُ</a:t>
@@ -30912,6 +31124,7 @@
                   <a:srgbClr val="1E6B52"/>
                 </a:solidFill>
                 <a:latin typeface="Amiri" pitchFamily="2" charset="-78"/>
+                <a:ea typeface="Amiri" pitchFamily="2" charset="-78"/>
                 <a:cs typeface="Amiri" pitchFamily="2" charset="-78"/>
               </a:rPr>
               <a:t>المُحَادَثَةُ</a:t>
@@ -31188,6 +31401,7 @@
                   <a:srgbClr val="8A6D1E"/>
                 </a:solidFill>
                 <a:latin typeface="Amiri" pitchFamily="2" charset="-78"/>
+                <a:ea typeface="Amiri" pitchFamily="2" charset="-78"/>
                 <a:cs typeface="Amiri" pitchFamily="2" charset="-78"/>
               </a:rPr>
               <a:t>قَيِّمْ</a:t>
@@ -31431,6 +31645,7 @@
                   <a:srgbClr val="D4AF37"/>
                 </a:solidFill>
                 <a:latin typeface="Amiri" pitchFamily="2" charset="-78"/>
+                <a:ea typeface="Amiri" pitchFamily="2" charset="-78"/>
                 <a:cs typeface="Amiri" pitchFamily="2" charset="-78"/>
               </a:rPr>
               <a:t>م</a:t>
@@ -31751,6 +31966,7 @@
                   <a:srgbClr val="8A6D1E"/>
                 </a:solidFill>
                 <a:latin typeface="Amiri" pitchFamily="2" charset="-78"/>
+                <a:ea typeface="Amiri" pitchFamily="2" charset="-78"/>
                 <a:cs typeface="Amiri" pitchFamily="2" charset="-78"/>
               </a:rPr>
               <a:t>امْتِحَانُ التَّحَدُّثِ</a:t>
@@ -32375,6 +32591,7 @@
                   <a:srgbClr val="1B3B6F"/>
                 </a:solidFill>
                 <a:latin typeface="Amiri" pitchFamily="2" charset="-78"/>
+                <a:ea typeface="Amiri" pitchFamily="2" charset="-78"/>
                 <a:cs typeface="Amiri" pitchFamily="2" charset="-78"/>
               </a:rPr>
               <a:t>عَفْوًا، هَلْ يُمْكِنُ أَنْ تُعِيدَ السُّؤَالَ؟</a:t>
@@ -32474,6 +32691,7 @@
                   <a:srgbClr val="1B3B6F"/>
                 </a:solidFill>
                 <a:latin typeface="Amiri" pitchFamily="2" charset="-78"/>
+                <a:ea typeface="Amiri" pitchFamily="2" charset="-78"/>
                 <a:cs typeface="Amiri" pitchFamily="2" charset="-78"/>
               </a:rPr>
               <a:t>لَحْظَةً، دَعْنِي أُفَكِّرُ …</a:t>
@@ -32573,6 +32791,7 @@
                   <a:srgbClr val="1B3B6F"/>
                 </a:solidFill>
                 <a:latin typeface="Amiri" pitchFamily="2" charset="-78"/>
+                <a:ea typeface="Amiri" pitchFamily="2" charset="-78"/>
                 <a:cs typeface="Amiri" pitchFamily="2" charset="-78"/>
               </a:rPr>
               <a:t>أَقْصِدُ …</a:t>
@@ -32744,6 +32963,7 @@
                   <a:srgbClr val="D4AF37"/>
                 </a:solidFill>
                 <a:latin typeface="Amiri" pitchFamily="2" charset="-78"/>
+                <a:ea typeface="Amiri" pitchFamily="2" charset="-78"/>
                 <a:cs typeface="Amiri" pitchFamily="2" charset="-78"/>
               </a:rPr>
               <a:t>م</a:t>
@@ -33064,6 +33284,7 @@
                   <a:srgbClr val="8A6D1E"/>
                 </a:solidFill>
                 <a:latin typeface="Amiri" pitchFamily="2" charset="-78"/>
+                <a:ea typeface="Amiri" pitchFamily="2" charset="-78"/>
                 <a:cs typeface="Amiri" pitchFamily="2" charset="-78"/>
               </a:rPr>
               <a:t>أَمَاكِنُ العِبَادَةِ وَأَتْبَاعُ الأَدْيَانِ</a:t>
@@ -33367,6 +33588,7 @@
                   <a:srgbClr val="1B3B6F"/>
                 </a:solidFill>
                 <a:latin typeface="Amiri" pitchFamily="2" charset="-78"/>
+                <a:ea typeface="Amiri" pitchFamily="2" charset="-78"/>
                 <a:cs typeface="Amiri" pitchFamily="2" charset="-78"/>
               </a:rPr>
               <a:t>دِينٌ</a:t>
@@ -33524,6 +33746,7 @@
                   <a:srgbClr val="1B3B6F"/>
                 </a:solidFill>
                 <a:latin typeface="Amiri" pitchFamily="2" charset="-78"/>
+                <a:ea typeface="Amiri" pitchFamily="2" charset="-78"/>
                 <a:cs typeface="Amiri" pitchFamily="2" charset="-78"/>
               </a:rPr>
               <a:t>دِينِيٌّ · دِينِيَّةٌ</a:t>
@@ -33627,6 +33850,7 @@
                   <a:srgbClr val="1B3B6F"/>
                 </a:solidFill>
                 <a:latin typeface="Amiri" pitchFamily="2" charset="-78"/>
+                <a:ea typeface="Amiri" pitchFamily="2" charset="-78"/>
                 <a:cs typeface="Amiri" pitchFamily="2" charset="-78"/>
               </a:rPr>
               <a:t>أَدْيَانٌ</a:t>
@@ -33892,6 +34116,7 @@
                   <a:srgbClr val="1B3B6F"/>
                 </a:solidFill>
                 <a:latin typeface="Amiri" pitchFamily="2" charset="-78"/>
+                <a:ea typeface="Amiri" pitchFamily="2" charset="-78"/>
                 <a:cs typeface="Amiri" pitchFamily="2" charset="-78"/>
               </a:rPr>
               <a:t>مَسْجِدٌ</a:t>
@@ -34049,6 +34274,7 @@
                   <a:srgbClr val="1B3B6F"/>
                 </a:solidFill>
                 <a:latin typeface="Amiri" pitchFamily="2" charset="-78"/>
+                <a:ea typeface="Amiri" pitchFamily="2" charset="-78"/>
                 <a:cs typeface="Amiri" pitchFamily="2" charset="-78"/>
               </a:rPr>
               <a:t>مِئْذَنَةٌ</a:t>
@@ -34152,6 +34378,7 @@
                   <a:srgbClr val="1B3B6F"/>
                 </a:solidFill>
                 <a:latin typeface="Amiri" pitchFamily="2" charset="-78"/>
+                <a:ea typeface="Amiri" pitchFamily="2" charset="-78"/>
                 <a:cs typeface="Amiri" pitchFamily="2" charset="-78"/>
               </a:rPr>
               <a:t>مَسَاجِدُ</a:t>
@@ -34417,6 +34644,7 @@
                   <a:srgbClr val="1B3B6F"/>
                 </a:solidFill>
                 <a:latin typeface="Amiri" pitchFamily="2" charset="-78"/>
+                <a:ea typeface="Amiri" pitchFamily="2" charset="-78"/>
                 <a:cs typeface="Amiri" pitchFamily="2" charset="-78"/>
               </a:rPr>
               <a:t>كَنِيسَةٌ</a:t>
@@ -34574,6 +34802,7 @@
                   <a:srgbClr val="1B3B6F"/>
                 </a:solidFill>
                 <a:latin typeface="Amiri" pitchFamily="2" charset="-78"/>
+                <a:ea typeface="Amiri" pitchFamily="2" charset="-78"/>
                 <a:cs typeface="Amiri" pitchFamily="2" charset="-78"/>
               </a:rPr>
               <a:t>كَاتِدْرَائِيَّةٌ</a:t>
@@ -34677,6 +34906,7 @@
                   <a:srgbClr val="1B3B6F"/>
                 </a:solidFill>
                 <a:latin typeface="Amiri" pitchFamily="2" charset="-78"/>
+                <a:ea typeface="Amiri" pitchFamily="2" charset="-78"/>
                 <a:cs typeface="Amiri" pitchFamily="2" charset="-78"/>
               </a:rPr>
               <a:t>كَنَائِسُ</a:t>
@@ -34942,6 +35172,7 @@
                   <a:srgbClr val="1B3B6F"/>
                 </a:solidFill>
                 <a:latin typeface="Amiri" pitchFamily="2" charset="-78"/>
+                <a:ea typeface="Amiri" pitchFamily="2" charset="-78"/>
                 <a:cs typeface="Amiri" pitchFamily="2" charset="-78"/>
               </a:rPr>
               <a:t>كَنِيسٌ</a:t>
@@ -35099,6 +35330,7 @@
                   <a:srgbClr val="1B3B6F"/>
                 </a:solidFill>
                 <a:latin typeface="Amiri" pitchFamily="2" charset="-78"/>
+                <a:ea typeface="Amiri" pitchFamily="2" charset="-78"/>
                 <a:cs typeface="Amiri" pitchFamily="2" charset="-78"/>
               </a:rPr>
               <a:t>مَعَابِدُ</a:t>
@@ -35202,6 +35434,7 @@
                   <a:srgbClr val="1B3B6F"/>
                 </a:solidFill>
                 <a:latin typeface="Amiri" pitchFamily="2" charset="-78"/>
+                <a:ea typeface="Amiri" pitchFamily="2" charset="-78"/>
                 <a:cs typeface="Amiri" pitchFamily="2" charset="-78"/>
               </a:rPr>
               <a:t>مَعْبَدٌ</a:t>
@@ -35467,6 +35700,7 @@
                   <a:srgbClr val="1B3B6F"/>
                 </a:solidFill>
                 <a:latin typeface="Amiri" pitchFamily="2" charset="-78"/>
+                <a:ea typeface="Amiri" pitchFamily="2" charset="-78"/>
                 <a:cs typeface="Amiri" pitchFamily="2" charset="-78"/>
               </a:rPr>
               <a:t>مُسْلِمٌ · مَسِيحِيٌّ</a:t>
@@ -35624,6 +35858,7 @@
                   <a:srgbClr val="1B3B6F"/>
                 </a:solidFill>
                 <a:latin typeface="Amiri" pitchFamily="2" charset="-78"/>
+                <a:ea typeface="Amiri" pitchFamily="2" charset="-78"/>
                 <a:cs typeface="Amiri" pitchFamily="2" charset="-78"/>
               </a:rPr>
               <a:t>مُسْلِمُونَ · مَسِيحِيُّونَ</a:t>
@@ -35727,6 +35962,7 @@
                   <a:srgbClr val="1B3B6F"/>
                 </a:solidFill>
                 <a:latin typeface="Amiri" pitchFamily="2" charset="-78"/>
+                <a:ea typeface="Amiri" pitchFamily="2" charset="-78"/>
                 <a:cs typeface="Amiri" pitchFamily="2" charset="-78"/>
               </a:rPr>
               <a:t>مُسْلِمَةٌ · مَسِيحِيَّةٌ</a:t>
@@ -35992,6 +36228,7 @@
                   <a:srgbClr val="1B3B6F"/>
                 </a:solidFill>
                 <a:latin typeface="Amiri" pitchFamily="2" charset="-78"/>
+                <a:ea typeface="Amiri" pitchFamily="2" charset="-78"/>
                 <a:cs typeface="Amiri" pitchFamily="2" charset="-78"/>
               </a:rPr>
               <a:t>يَهُودِيٌّ · هِنْدُوسِيٌّ</a:t>
@@ -36149,6 +36386,7 @@
                   <a:srgbClr val="1B3B6F"/>
                 </a:solidFill>
                 <a:latin typeface="Amiri" pitchFamily="2" charset="-78"/>
+                <a:ea typeface="Amiri" pitchFamily="2" charset="-78"/>
                 <a:cs typeface="Amiri" pitchFamily="2" charset="-78"/>
               </a:rPr>
               <a:t>بُوذِيٌّ</a:t>
@@ -36252,6 +36490,7 @@
                   <a:srgbClr val="1B3B6F"/>
                 </a:solidFill>
                 <a:latin typeface="Amiri" pitchFamily="2" charset="-78"/>
+                <a:ea typeface="Amiri" pitchFamily="2" charset="-78"/>
                 <a:cs typeface="Amiri" pitchFamily="2" charset="-78"/>
               </a:rPr>
               <a:t>سِيخِيٌّ</a:t>
@@ -36385,6 +36624,7 @@
                   <a:srgbClr val="D4AF37"/>
                 </a:solidFill>
                 <a:latin typeface="Amiri" pitchFamily="2" charset="-78"/>
+                <a:ea typeface="Amiri" pitchFamily="2" charset="-78"/>
                 <a:cs typeface="Amiri" pitchFamily="2" charset="-78"/>
               </a:rPr>
               <a:t>م</a:t>
@@ -36705,6 +36945,7 @@
                   <a:srgbClr val="8A6D1E"/>
                 </a:solidFill>
                 <a:latin typeface="Amiri" pitchFamily="2" charset="-78"/>
+                <a:ea typeface="Amiri" pitchFamily="2" charset="-78"/>
                 <a:cs typeface="Amiri" pitchFamily="2" charset="-78"/>
               </a:rPr>
               <a:t>الوَصْفُ بِالاسْمِ المَوْصُولِ</a:t>
@@ -37008,6 +37249,7 @@
                   <a:srgbClr val="1B3B6F"/>
                 </a:solidFill>
                 <a:latin typeface="Amiri" pitchFamily="2" charset="-78"/>
+                <a:ea typeface="Amiri" pitchFamily="2" charset="-78"/>
                 <a:cs typeface="Amiri" pitchFamily="2" charset="-78"/>
               </a:rPr>
               <a:t>يُؤْمِنُ بِاللّٰهِ</a:t>
@@ -37165,6 +37407,7 @@
                   <a:srgbClr val="1B3B6F"/>
                 </a:solidFill>
                 <a:latin typeface="Amiri" pitchFamily="2" charset="-78"/>
+                <a:ea typeface="Amiri" pitchFamily="2" charset="-78"/>
                 <a:cs typeface="Amiri" pitchFamily="2" charset="-78"/>
               </a:rPr>
               <a:t>مُعْتَقَدَاتٌ</a:t>
@@ -37268,6 +37511,7 @@
                   <a:srgbClr val="1B3B6F"/>
                 </a:solidFill>
                 <a:latin typeface="Amiri" pitchFamily="2" charset="-78"/>
+                <a:ea typeface="Amiri" pitchFamily="2" charset="-78"/>
                 <a:cs typeface="Amiri" pitchFamily="2" charset="-78"/>
               </a:rPr>
               <a:t>إِيمَانٌ</a:t>
@@ -37533,6 +37777,7 @@
                   <a:srgbClr val="1B3B6F"/>
                 </a:solidFill>
                 <a:latin typeface="Amiri" pitchFamily="2" charset="-78"/>
+                <a:ea typeface="Amiri" pitchFamily="2" charset="-78"/>
                 <a:cs typeface="Amiri" pitchFamily="2" charset="-78"/>
               </a:rPr>
               <a:t>يُصَلِّي</a:t>
@@ -37690,6 +37935,7 @@
                   <a:srgbClr val="1B3B6F"/>
                 </a:solidFill>
                 <a:latin typeface="Amiri" pitchFamily="2" charset="-78"/>
+                <a:ea typeface="Amiri" pitchFamily="2" charset="-78"/>
                 <a:cs typeface="Amiri" pitchFamily="2" charset="-78"/>
               </a:rPr>
               <a:t>عِبَادَةٌ</a:t>
@@ -37793,6 +38039,7 @@
                   <a:srgbClr val="1B3B6F"/>
                 </a:solidFill>
                 <a:latin typeface="Amiri" pitchFamily="2" charset="-78"/>
+                <a:ea typeface="Amiri" pitchFamily="2" charset="-78"/>
                 <a:cs typeface="Amiri" pitchFamily="2" charset="-78"/>
               </a:rPr>
               <a:t>صَلَاةٌ</a:t>
@@ -38058,6 +38305,7 @@
                   <a:srgbClr val="1B3B6F"/>
                 </a:solidFill>
                 <a:latin typeface="Amiri" pitchFamily="2" charset="-78"/>
+                <a:ea typeface="Amiri" pitchFamily="2" charset="-78"/>
                 <a:cs typeface="Amiri" pitchFamily="2" charset="-78"/>
               </a:rPr>
               <a:t>الَّذِي · الَّتِي · الَّذِينَ</a:t>
@@ -38107,11 +38355,12 @@
               <a:buNone/>
             </a:pPr>
             <a:r>
-              <a:rPr lang="en-US" sz="1100" i="1" dirty="0">
+              <a:rPr lang="ar-SA" sz="1100" i="1" dirty="0">
                 <a:solidFill>
                   <a:srgbClr val="5A6472"/>
                 </a:solidFill>
                 <a:latin typeface="Calibri" pitchFamily="34" charset="0"/>
+                <a:ea typeface="Amiri" pitchFamily="2" charset="-78"/>
                 <a:cs typeface="Amiri" pitchFamily="2" charset="-78"/>
               </a:rPr>
               <a:t>al-َ-dhī · al-َ-tī · al-َ-dhī-na</a:t>
@@ -38215,6 +38464,7 @@
                   <a:srgbClr val="1B3B6F"/>
                 </a:solidFill>
                 <a:latin typeface="Amiri" pitchFamily="2" charset="-78"/>
+                <a:ea typeface="Amiri" pitchFamily="2" charset="-78"/>
                 <a:cs typeface="Amiri" pitchFamily="2" charset="-78"/>
               </a:rPr>
               <a:t>النَّاسُ الَّذِينَ</a:t>
@@ -38318,6 +38568,7 @@
                   <a:srgbClr val="1B3B6F"/>
                 </a:solidFill>
                 <a:latin typeface="Amiri" pitchFamily="2" charset="-78"/>
+                <a:ea typeface="Amiri" pitchFamily="2" charset="-78"/>
                 <a:cs typeface="Amiri" pitchFamily="2" charset="-78"/>
               </a:rPr>
               <a:t>المَسْجِدُ الَّذِي</a:t>
@@ -38583,6 +38834,7 @@
                   <a:srgbClr val="1B3B6F"/>
                 </a:solidFill>
                 <a:latin typeface="Amiri" pitchFamily="2" charset="-78"/>
+                <a:ea typeface="Amiri" pitchFamily="2" charset="-78"/>
                 <a:cs typeface="Amiri" pitchFamily="2" charset="-78"/>
               </a:rPr>
               <a:t>بِجَانِبِ · أَمَامَ</a:t>
@@ -38740,6 +38992,7 @@
                   <a:srgbClr val="1B3B6F"/>
                 </a:solidFill>
                 <a:latin typeface="Amiri" pitchFamily="2" charset="-78"/>
+                <a:ea typeface="Amiri" pitchFamily="2" charset="-78"/>
                 <a:cs typeface="Amiri" pitchFamily="2" charset="-78"/>
               </a:rPr>
               <a:t>مُقَابِلَ</a:t>
@@ -38843,6 +39096,7 @@
                   <a:srgbClr val="1B3B6F"/>
                 </a:solidFill>
                 <a:latin typeface="Amiri" pitchFamily="2" charset="-78"/>
+                <a:ea typeface="Amiri" pitchFamily="2" charset="-78"/>
                 <a:cs typeface="Amiri" pitchFamily="2" charset="-78"/>
               </a:rPr>
               <a:t>دَاخِلَ</a:t>
@@ -39108,6 +39362,7 @@
                   <a:srgbClr val="1B3B6F"/>
                 </a:solidFill>
                 <a:latin typeface="Amiri" pitchFamily="2" charset="-78"/>
+                <a:ea typeface="Amiri" pitchFamily="2" charset="-78"/>
                 <a:cs typeface="Amiri" pitchFamily="2" charset="-78"/>
               </a:rPr>
               <a:t>الاحْتِرَامُ المُتَبَادَلُ</a:t>
@@ -39265,6 +39520,7 @@
                   <a:srgbClr val="1B3B6F"/>
                 </a:solidFill>
                 <a:latin typeface="Amiri" pitchFamily="2" charset="-78"/>
+                <a:ea typeface="Amiri" pitchFamily="2" charset="-78"/>
                 <a:cs typeface="Amiri" pitchFamily="2" charset="-78"/>
               </a:rPr>
               <a:t>التَّعَايُشُ</a:t>
@@ -39368,6 +39624,7 @@
                   <a:srgbClr val="1B3B6F"/>
                 </a:solidFill>
                 <a:latin typeface="Amiri" pitchFamily="2" charset="-78"/>
+                <a:ea typeface="Amiri" pitchFamily="2" charset="-78"/>
                 <a:cs typeface="Amiri" pitchFamily="2" charset="-78"/>
               </a:rPr>
               <a:t>التَّسَامُحُ</a:t>
@@ -39633,6 +39890,7 @@
                   <a:srgbClr val="1B3B6F"/>
                 </a:solidFill>
                 <a:latin typeface="Amiri" pitchFamily="2" charset="-78"/>
+                <a:ea typeface="Amiri" pitchFamily="2" charset="-78"/>
                 <a:cs typeface="Amiri" pitchFamily="2" charset="-78"/>
               </a:rPr>
               <a:t>يَحْتَرِمُ</a:t>
@@ -39790,6 +40048,7 @@
                   <a:srgbClr val="1B3B6F"/>
                 </a:solidFill>
                 <a:latin typeface="Amiri" pitchFamily="2" charset="-78"/>
+                <a:ea typeface="Amiri" pitchFamily="2" charset="-78"/>
                 <a:cs typeface="Amiri" pitchFamily="2" charset="-78"/>
               </a:rPr>
               <a:t>مُحْتَرِمٌ · مُحْتَرِمَةٌ</a:t>
@@ -39893,6 +40152,7 @@
                   <a:srgbClr val="1B3B6F"/>
                 </a:solidFill>
                 <a:latin typeface="Amiri" pitchFamily="2" charset="-78"/>
+                <a:ea typeface="Amiri" pitchFamily="2" charset="-78"/>
                 <a:cs typeface="Amiri" pitchFamily="2" charset="-78"/>
               </a:rPr>
               <a:t>أَحْتَرِمُ</a:t>
@@ -40026,6 +40286,7 @@
                   <a:srgbClr val="D4AF37"/>
                 </a:solidFill>
                 <a:latin typeface="Amiri" pitchFamily="2" charset="-78"/>
+                <a:ea typeface="Amiri" pitchFamily="2" charset="-78"/>
                 <a:cs typeface="Amiri" pitchFamily="2" charset="-78"/>
               </a:rPr>
               <a:t>م</a:t>
@@ -40346,6 +40607,7 @@
                   <a:srgbClr val="8A6D1E"/>
                 </a:solidFill>
                 <a:latin typeface="Amiri" pitchFamily="2" charset="-78"/>
+                <a:ea typeface="Amiri" pitchFamily="2" charset="-78"/>
                 <a:cs typeface="Amiri" pitchFamily="2" charset="-78"/>
               </a:rPr>
               <a:t>فِي الغُرَفِ</a:t>
@@ -41522,6 +41784,7 @@
                   <a:srgbClr val="1B3B6F"/>
                 </a:solidFill>
                 <a:latin typeface="Amiri" pitchFamily="2" charset="-78"/>
+                <a:ea typeface="Amiri" pitchFamily="2" charset="-78"/>
                 <a:cs typeface="Amiri" pitchFamily="2" charset="-78"/>
               </a:rPr>
               <a:t>دَوْرُكَ!</a:t>
@@ -41598,6 +41861,7 @@
                   <a:srgbClr val="1B3B6F"/>
                 </a:solidFill>
                 <a:latin typeface="Amiri" pitchFamily="2" charset="-78"/>
+                <a:ea typeface="Amiri" pitchFamily="2" charset="-78"/>
                 <a:cs typeface="Amiri" pitchFamily="2" charset="-78"/>
               </a:rPr>
               <a:t>أَحْسَنْتَ! / أَحْسَنْتِ!</a:t>
@@ -41674,6 +41938,7 @@
                   <a:srgbClr val="1B3B6F"/>
                 </a:solidFill>
                 <a:latin typeface="Amiri" pitchFamily="2" charset="-78"/>
+                <a:ea typeface="Amiri" pitchFamily="2" charset="-78"/>
                 <a:cs typeface="Amiri" pitchFamily="2" charset="-78"/>
               </a:rPr>
               <a:t>تَكَلَّمْ أَكْثَرَ، مِنْ فَضْلِكَ</a:t>
@@ -41750,6 +42015,7 @@
                   <a:srgbClr val="1B3B6F"/>
                 </a:solidFill>
                 <a:latin typeface="Amiri" pitchFamily="2" charset="-78"/>
+                <a:ea typeface="Amiri" pitchFamily="2" charset="-78"/>
                 <a:cs typeface="Amiri" pitchFamily="2" charset="-78"/>
               </a:rPr>
               <a:t>لِمَاذَا؟</a:t>
@@ -41921,6 +42187,7 @@
                   <a:srgbClr val="D4AF37"/>
                 </a:solidFill>
                 <a:latin typeface="Amiri" pitchFamily="2" charset="-78"/>
+                <a:ea typeface="Amiri" pitchFamily="2" charset="-78"/>
                 <a:cs typeface="Amiri" pitchFamily="2" charset="-78"/>
               </a:rPr>
               <a:t>م</a:t>
@@ -42241,6 +42508,7 @@
                   <a:srgbClr val="8A6D1E"/>
                 </a:solidFill>
                 <a:latin typeface="Amiri" pitchFamily="2" charset="-78"/>
+                <a:ea typeface="Amiri" pitchFamily="2" charset="-78"/>
                 <a:cs typeface="Amiri" pitchFamily="2" charset="-78"/>
               </a:rPr>
               <a:t>يَوْمُ المَسْجِدِ المَفْتُوحُ</a:t>
@@ -42521,6 +42789,7 @@
                   <a:srgbClr val="1B3B6F"/>
                 </a:solidFill>
                 <a:latin typeface="Amiri" pitchFamily="2" charset="-78"/>
+                <a:ea typeface="Amiri" pitchFamily="2" charset="-78"/>
                 <a:cs typeface="Amiri" pitchFamily="2" charset="-78"/>
               </a:rPr>
               <a:t>اسْمُهُ مَسْجِدُ …</a:t>
@@ -42597,6 +42866,7 @@
                   <a:srgbClr val="1B3B6F"/>
                 </a:solidFill>
                 <a:latin typeface="Amiri" pitchFamily="2" charset="-78"/>
+                <a:ea typeface="Amiri" pitchFamily="2" charset="-78"/>
                 <a:cs typeface="Amiri" pitchFamily="2" charset="-78"/>
               </a:rPr>
               <a:t>صَبَاحَ الخَيْرِ! مَا اسْمُ هٰذَا المَسْجِدِ؟</a:t>
@@ -42765,6 +43035,7 @@
                   <a:srgbClr val="1B3B6F"/>
                 </a:solidFill>
                 <a:latin typeface="Amiri" pitchFamily="2" charset="-78"/>
+                <a:ea typeface="Amiri" pitchFamily="2" charset="-78"/>
                 <a:cs typeface="Amiri" pitchFamily="2" charset="-78"/>
               </a:rPr>
               <a:t>بُنِيَ فِي سَنَةِ …</a:t>
@@ -42841,6 +43112,7 @@
                   <a:srgbClr val="1B3B6F"/>
                 </a:solidFill>
                 <a:latin typeface="Amiri" pitchFamily="2" charset="-78"/>
+                <a:ea typeface="Amiri" pitchFamily="2" charset="-78"/>
                 <a:cs typeface="Amiri" pitchFamily="2" charset="-78"/>
               </a:rPr>
               <a:t>هَلْ هُوَ قَدِيمٌ؟</a:t>
@@ -43009,6 +43281,7 @@
                   <a:srgbClr val="1B3B6F"/>
                 </a:solidFill>
                 <a:latin typeface="Amiri" pitchFamily="2" charset="-78"/>
+                <a:ea typeface="Amiri" pitchFamily="2" charset="-78"/>
                 <a:cs typeface="Amiri" pitchFamily="2" charset="-78"/>
               </a:rPr>
               <a:t>يُوجَدُ … وَ…</a:t>
@@ -43085,6 +43358,7 @@
                   <a:srgbClr val="1B3B6F"/>
                 </a:solidFill>
                 <a:latin typeface="Amiri" pitchFamily="2" charset="-78"/>
+                <a:ea typeface="Amiri" pitchFamily="2" charset="-78"/>
                 <a:cs typeface="Amiri" pitchFamily="2" charset="-78"/>
               </a:rPr>
               <a:t>مَاذَا يُوجَدُ دَاخِلَ المَسْجِدِ؟</a:t>
@@ -43253,6 +43527,7 @@
                   <a:srgbClr val="1B3B6F"/>
                 </a:solidFill>
                 <a:latin typeface="Amiri" pitchFamily="2" charset="-78"/>
+                <a:ea typeface="Amiri" pitchFamily="2" charset="-78"/>
                 <a:cs typeface="Amiri" pitchFamily="2" charset="-78"/>
               </a:rPr>
               <a:t>أَيْنَ …؟</a:t>
@@ -43329,6 +43604,7 @@
                   <a:srgbClr val="1B3B6F"/>
                 </a:solidFill>
                 <a:latin typeface="Amiri" pitchFamily="2" charset="-78"/>
+                <a:ea typeface="Amiri" pitchFamily="2" charset="-78"/>
                 <a:cs typeface="Amiri" pitchFamily="2" charset="-78"/>
               </a:rPr>
               <a:t>جَمِيلٌ! أَنَا جَارُكُمْ.</a:t>
@@ -43497,6 +43773,7 @@
                   <a:srgbClr val="1B3B6F"/>
                 </a:solidFill>
                 <a:latin typeface="Amiri" pitchFamily="2" charset="-78"/>
+                <a:ea typeface="Amiri" pitchFamily="2" charset="-78"/>
                 <a:cs typeface="Amiri" pitchFamily="2" charset="-78"/>
               </a:rPr>
               <a:t>يُصَلِّي المُسْلِمُونَ … مَرَّاتٍ فِي اليَوْمِ.</a:t>
@@ -43573,6 +43850,7 @@
                   <a:srgbClr val="1B3B6F"/>
                 </a:solidFill>
                 <a:latin typeface="Amiri" pitchFamily="2" charset="-78"/>
+                <a:ea typeface="Amiri" pitchFamily="2" charset="-78"/>
                 <a:cs typeface="Amiri" pitchFamily="2" charset="-78"/>
               </a:rPr>
               <a:t>فِي الشَّارِعِ المُقَابِلِ. كَمْ مَرَّةً يُصَلِّي المُسْلِمُونَ؟</a:t>
@@ -43847,6 +44125,7 @@
                   <a:srgbClr val="D4AF37"/>
                 </a:solidFill>
                 <a:latin typeface="Amiri" pitchFamily="2" charset="-78"/>
+                <a:ea typeface="Amiri" pitchFamily="2" charset="-78"/>
                 <a:cs typeface="Amiri" pitchFamily="2" charset="-78"/>
               </a:rPr>
               <a:t>م</a:t>
@@ -44167,6 +44446,7 @@
                   <a:srgbClr val="8A6D1E"/>
                 </a:solidFill>
                 <a:latin typeface="Amiri" pitchFamily="2" charset="-78"/>
+                <a:ea typeface="Amiri" pitchFamily="2" charset="-78"/>
                 <a:cs typeface="Amiri" pitchFamily="2" charset="-78"/>
               </a:rPr>
               <a:t>التَّخْطِيطُ لِزِيَارَةٍ مَدْرَسِيَّةٍ</a:t>
@@ -44447,6 +44727,7 @@
                   <a:srgbClr val="1B3B6F"/>
                 </a:solidFill>
                 <a:latin typeface="Amiri" pitchFamily="2" charset="-78"/>
+                <a:ea typeface="Amiri" pitchFamily="2" charset="-78"/>
                 <a:cs typeface="Amiri" pitchFamily="2" charset="-78"/>
               </a:rPr>
               <a:t>أَعْرِفُ … الَّتِي / الَّذِي … بِجَانِبِ …</a:t>
@@ -44523,6 +44804,7 @@
                   <a:srgbClr val="1B3B6F"/>
                 </a:solidFill>
                 <a:latin typeface="Amiri" pitchFamily="2" charset="-78"/>
+                <a:ea typeface="Amiri" pitchFamily="2" charset="-78"/>
                 <a:cs typeface="Amiri" pitchFamily="2" charset="-78"/>
               </a:rPr>
               <a:t>سَنَزُورُ ثَلَاثَةَ أَمَاكِنَ لِلْعِبَادَةِ. أَيُّ مَكَانٍ تَعْرِفُهُ؟</a:t>
@@ -44691,6 +44973,7 @@
                   <a:srgbClr val="1B3B6F"/>
                 </a:solidFill>
                 <a:latin typeface="Amiri" pitchFamily="2" charset="-78"/>
+                <a:ea typeface="Amiri" pitchFamily="2" charset="-78"/>
                 <a:cs typeface="Amiri" pitchFamily="2" charset="-78"/>
               </a:rPr>
               <a:t>هِيَ … وَلَهَا …</a:t>
@@ -44767,6 +45050,7 @@
                   <a:srgbClr val="1B3B6F"/>
                 </a:solidFill>
                 <a:latin typeface="Amiri" pitchFamily="2" charset="-78"/>
+                <a:ea typeface="Amiri" pitchFamily="2" charset="-78"/>
                 <a:cs typeface="Amiri" pitchFamily="2" charset="-78"/>
               </a:rPr>
               <a:t>كَيْفَ هِيَ؟</a:t>
@@ -44935,6 +45219,7 @@
                   <a:srgbClr val="1B3B6F"/>
                 </a:solidFill>
                 <a:latin typeface="Amiri" pitchFamily="2" charset="-78"/>
+                <a:ea typeface="Amiri" pitchFamily="2" charset="-78"/>
                 <a:cs typeface="Amiri" pitchFamily="2" charset="-78"/>
               </a:rPr>
               <a:t>يَنْبَغِي أَنْ … وَلَا …</a:t>
@@ -45011,6 +45296,7 @@
                   <a:srgbClr val="1B3B6F"/>
                 </a:solidFill>
                 <a:latin typeface="Amiri" pitchFamily="2" charset="-78"/>
+                <a:ea typeface="Amiri" pitchFamily="2" charset="-78"/>
                 <a:cs typeface="Amiri" pitchFamily="2" charset="-78"/>
               </a:rPr>
               <a:t>كَيْفَ نَتَصَرَّفُ بِاحْتِرَامٍ هُنَاكَ؟</a:t>
@@ -45114,6 +45400,7 @@
                   <a:srgbClr val="1B3B6F"/>
                 </a:solidFill>
                 <a:latin typeface="Amiri" pitchFamily="2" charset="-78"/>
+                <a:ea typeface="Amiri" pitchFamily="2" charset="-78"/>
                 <a:cs typeface="Amiri" pitchFamily="2" charset="-78"/>
               </a:rPr>
               <a:t>هَلْ يَجِبُ أَنْ …؟ وَمَتَى …؟</a:t>
@@ -45190,6 +45477,7 @@
                   <a:srgbClr val="1B3B6F"/>
                 </a:solidFill>
                 <a:latin typeface="Amiri" pitchFamily="2" charset="-78"/>
+                <a:ea typeface="Amiri" pitchFamily="2" charset="-78"/>
                 <a:cs typeface="Amiri" pitchFamily="2" charset="-78"/>
               </a:rPr>
               <a:t>سَنَزُورُ أَيْضًا مَعْبَدًا لِلسِّيخِ.</a:t>
@@ -45293,6 +45581,7 @@
                   <a:srgbClr val="1B3B6F"/>
                 </a:solidFill>
                 <a:latin typeface="Amiri" pitchFamily="2" charset="-78"/>
+                <a:ea typeface="Amiri" pitchFamily="2" charset="-78"/>
                 <a:cs typeface="Amiri" pitchFamily="2" charset="-78"/>
               </a:rPr>
               <a:t>لِأَنَّنَا نَتَعَلَّمُ … ، وَ…</a:t>
@@ -45369,6 +45658,7 @@
                   <a:srgbClr val="1B3B6F"/>
                 </a:solidFill>
                 <a:latin typeface="Amiri" pitchFamily="2" charset="-78"/>
+                <a:ea typeface="Amiri" pitchFamily="2" charset="-78"/>
                 <a:cs typeface="Amiri" pitchFamily="2" charset="-78"/>
               </a:rPr>
               <a:t>نَعَمْ، فِي العَاشِرَةِ. لِمَاذَا هٰذِهِ الزِّيَارَةُ مُفِيدَةٌ؟</a:t>
@@ -45543,13 +45833,9 @@
     <a:fontScheme name="Office">
       <a:majorFont>
         <a:latin typeface="Calibri Light" panose="020F0302020204030204"/>
-        <a:ea typeface=""/>
-        <a:cs typeface=""/>
-        <a:font script="Jpan" typeface="游ゴシック Light"/>
-        <a:font script="Hang" typeface="맑은 고딕"/>
-        <a:font script="Hans" typeface="等线 Light"/>
-        <a:font script="Hant" typeface="新細明體"/>
-        <a:font script="Arab" typeface="Times New Roman"/>
+        <a:ea typeface="Amiri" pitchFamily="2" charset="-78"/>
+        <a:cs typeface="Amiri" pitchFamily="2" charset="-78"/>
+        <a:font script="Arab" typeface="Amiri"/>
         <a:font script="Hebr" typeface="Times New Roman"/>
         <a:font script="Thai" typeface="Angsana New"/>
         <a:font script="Ethi" typeface="Nyala"/>
@@ -45595,13 +45881,9 @@
       </a:majorFont>
       <a:minorFont>
         <a:latin typeface="Calibri" panose="020F0502020204030204"/>
-        <a:ea typeface=""/>
-        <a:cs typeface=""/>
-        <a:font script="Jpan" typeface="游ゴシック"/>
-        <a:font script="Hang" typeface="맑은 고딕"/>
-        <a:font script="Hans" typeface="等线"/>
-        <a:font script="Hant" typeface="新細明體"/>
-        <a:font script="Arab" typeface="Arial"/>
+        <a:ea typeface="Amiri" pitchFamily="2" charset="-78"/>
+        <a:cs typeface="Amiri" pitchFamily="2" charset="-78"/>
+        <a:font script="Arab" typeface="Amiri"/>
         <a:font script="Hebr" typeface="Arial"/>
         <a:font script="Thai" typeface="Cordia New"/>
         <a:font script="Ethi" typeface="Nyala"/>
